--- a/Документы/ИСТ122_ТРМП_КП_Презентация_Жминьковская.pptx
+++ b/Документы/ИСТ122_ТРМП_КП_Презентация_Жминьковская.pptx
@@ -4827,10 +4827,10 @@
       </p:sp>
       <p:pic>
         <p:nvPicPr>
-          <p:cNvPr id="8" name="Рисунок 7">
+          <p:cNvPr id="6" name="Рисунок 5">
             <a:extLst>
               <a:ext uri="{FF2B5EF4-FFF2-40B4-BE49-F238E27FC236}">
-                <a16:creationId xmlns:a16="http://schemas.microsoft.com/office/drawing/2014/main" id="{57B5F4D5-3118-44F1-87CD-DDA0736F4964}"/>
+                <a16:creationId xmlns:a16="http://schemas.microsoft.com/office/drawing/2014/main" id="{46DC631B-228B-42A8-91B4-448CB7C84DA7}"/>
               </a:ext>
             </a:extLst>
           </p:cNvPr>
@@ -4853,8 +4853,8 @@
         </p:blipFill>
         <p:spPr>
           <a:xfrm>
-            <a:off x="1155171" y="1173710"/>
-            <a:ext cx="9964783" cy="4784177"/>
+            <a:off x="1429333" y="1173710"/>
+            <a:ext cx="9333333" cy="5066667"/>
           </a:xfrm>
           <a:prstGeom prst="rect">
             <a:avLst/>
@@ -4920,6 +4920,9 @@
               <a:rPr lang="en-US" dirty="0"/>
               <a:t>API</a:t>
             </a:r>
+            <a:br>
+              <a:rPr lang="ru-RU" dirty="0"/>
+            </a:br>
             <a:endParaRPr lang="ru-RU" dirty="0"/>
           </a:p>
         </p:txBody>
@@ -4940,13 +4943,13 @@
             <p:ph idx="1"/>
             <p:extLst>
               <p:ext uri="{D42A27DB-BD31-4B8C-83A1-F6EECF244321}">
-                <p14:modId xmlns:p14="http://schemas.microsoft.com/office/powerpoint/2010/main" val="2864304995"/>
+                <p14:modId xmlns:p14="http://schemas.microsoft.com/office/powerpoint/2010/main" val="2080730394"/>
               </p:ext>
             </p:extLst>
           </p:nvPr>
         </p:nvGraphicFramePr>
         <p:xfrm>
-          <a:off x="1218946" y="1604691"/>
+          <a:off x="1173226" y="1092627"/>
           <a:ext cx="9690353" cy="4855094"/>
         </p:xfrm>
         <a:graphic>
@@ -5019,18 +5022,62 @@
                       </a:pPr>
                       <a:r>
                         <a:rPr lang="en-US" sz="1100" dirty="0">
+                          <a:solidFill>
+                            <a:schemeClr val="tx1"/>
+                          </a:solidFill>
                           <a:effectLst/>
                         </a:rPr>
                         <a:t>ID</a:t>
                       </a:r>
                       <a:endParaRPr lang="ru-RU" sz="1100" dirty="0">
+                        <a:solidFill>
+                          <a:schemeClr val="tx1"/>
+                        </a:solidFill>
                         <a:effectLst/>
                         <a:latin typeface="Times New Roman" panose="02020603050405020304" pitchFamily="18" charset="0"/>
                         <a:ea typeface="Times New Roman" panose="02020603050405020304" pitchFamily="18" charset="0"/>
                       </a:endParaRPr>
                     </a:p>
                   </a:txBody>
-                  <a:tcPr marL="27428" marR="27428" marT="0" marB="0"/>
+                  <a:tcPr marL="27428" marR="27428" marT="0" marB="0">
+                    <a:lnL w="12700" cap="flat" cmpd="sng" algn="ctr">
+                      <a:solidFill>
+                        <a:schemeClr val="tx1"/>
+                      </a:solidFill>
+                      <a:prstDash val="solid"/>
+                      <a:round/>
+                      <a:headEnd type="none" w="med" len="med"/>
+                      <a:tailEnd type="none" w="med" len="med"/>
+                    </a:lnL>
+                    <a:lnR w="12700" cap="flat" cmpd="sng" algn="ctr">
+                      <a:solidFill>
+                        <a:schemeClr val="tx1"/>
+                      </a:solidFill>
+                      <a:prstDash val="solid"/>
+                      <a:round/>
+                      <a:headEnd type="none" w="med" len="med"/>
+                      <a:tailEnd type="none" w="med" len="med"/>
+                    </a:lnR>
+                    <a:lnT w="12700" cap="flat" cmpd="sng" algn="ctr">
+                      <a:solidFill>
+                        <a:schemeClr val="tx1"/>
+                      </a:solidFill>
+                      <a:prstDash val="solid"/>
+                      <a:round/>
+                      <a:headEnd type="none" w="med" len="med"/>
+                      <a:tailEnd type="none" w="med" len="med"/>
+                    </a:lnT>
+                    <a:lnB w="12700" cap="flat" cmpd="sng" algn="ctr">
+                      <a:solidFill>
+                        <a:schemeClr val="tx1"/>
+                      </a:solidFill>
+                      <a:prstDash val="solid"/>
+                      <a:round/>
+                      <a:headEnd type="none" w="med" len="med"/>
+                      <a:tailEnd type="none" w="med" len="med"/>
+                    </a:lnB>
+                    <a:noFill/>
+                  </a:tcPr>
                 </a:tc>
                 <a:tc gridSpan="4">
                   <a:txBody>
@@ -5044,30 +5091,80 @@
                       </a:pPr>
                       <a:r>
                         <a:rPr lang="en-US" sz="1100" dirty="0" err="1">
+                          <a:solidFill>
+                            <a:schemeClr val="tx1"/>
+                          </a:solidFill>
                           <a:effectLst/>
                         </a:rPr>
                         <a:t>Наименование</a:t>
                       </a:r>
                       <a:r>
                         <a:rPr lang="en-US" sz="1100" dirty="0">
+                          <a:solidFill>
+                            <a:schemeClr val="tx1"/>
+                          </a:solidFill>
                           <a:effectLst/>
                         </a:rPr>
                         <a:t> </a:t>
                       </a:r>
                       <a:r>
                         <a:rPr lang="en-US" sz="1100" dirty="0" err="1">
+                          <a:solidFill>
+                            <a:schemeClr val="tx1"/>
+                          </a:solidFill>
                           <a:effectLst/>
                         </a:rPr>
                         <a:t>бизнес-операции</a:t>
                       </a:r>
                       <a:endParaRPr lang="ru-RU" sz="1100" dirty="0">
+                        <a:solidFill>
+                          <a:schemeClr val="tx1"/>
+                        </a:solidFill>
                         <a:effectLst/>
                         <a:latin typeface="Times New Roman" panose="02020603050405020304" pitchFamily="18" charset="0"/>
                         <a:ea typeface="Times New Roman" panose="02020603050405020304" pitchFamily="18" charset="0"/>
                       </a:endParaRPr>
                     </a:p>
                   </a:txBody>
-                  <a:tcPr marL="27428" marR="27428" marT="0" marB="0"/>
+                  <a:tcPr marL="27428" marR="27428" marT="0" marB="0">
+                    <a:lnL w="12700" cap="flat" cmpd="sng" algn="ctr">
+                      <a:solidFill>
+                        <a:schemeClr val="tx1"/>
+                      </a:solidFill>
+                      <a:prstDash val="solid"/>
+                      <a:round/>
+                      <a:headEnd type="none" w="med" len="med"/>
+                      <a:tailEnd type="none" w="med" len="med"/>
+                    </a:lnL>
+                    <a:lnR w="12700" cap="flat" cmpd="sng" algn="ctr">
+                      <a:solidFill>
+                        <a:schemeClr val="tx1"/>
+                      </a:solidFill>
+                      <a:prstDash val="solid"/>
+                      <a:round/>
+                      <a:headEnd type="none" w="med" len="med"/>
+                      <a:tailEnd type="none" w="med" len="med"/>
+                    </a:lnR>
+                    <a:lnT w="12700" cap="flat" cmpd="sng" algn="ctr">
+                      <a:solidFill>
+                        <a:schemeClr val="tx1"/>
+                      </a:solidFill>
+                      <a:prstDash val="solid"/>
+                      <a:round/>
+                      <a:headEnd type="none" w="med" len="med"/>
+                      <a:tailEnd type="none" w="med" len="med"/>
+                    </a:lnT>
+                    <a:lnB w="12700" cap="flat" cmpd="sng" algn="ctr">
+                      <a:solidFill>
+                        <a:schemeClr val="tx1"/>
+                      </a:solidFill>
+                      <a:prstDash val="solid"/>
+                      <a:round/>
+                      <a:headEnd type="none" w="med" len="med"/>
+                      <a:tailEnd type="none" w="med" len="med"/>
+                    </a:lnB>
+                    <a:noFill/>
+                  </a:tcPr>
                 </a:tc>
                 <a:tc hMerge="1">
                   <a:txBody>
@@ -5111,18 +5208,62 @@
                       </a:pPr>
                       <a:r>
                         <a:rPr lang="en-US" sz="1100">
+                          <a:solidFill>
+                            <a:schemeClr val="tx1"/>
+                          </a:solidFill>
                           <a:effectLst/>
                         </a:rPr>
                         <a:t>Описание</a:t>
                       </a:r>
                       <a:endParaRPr lang="ru-RU" sz="1100">
+                        <a:solidFill>
+                          <a:schemeClr val="tx1"/>
+                        </a:solidFill>
                         <a:effectLst/>
                         <a:latin typeface="Times New Roman" panose="02020603050405020304" pitchFamily="18" charset="0"/>
                         <a:ea typeface="Times New Roman" panose="02020603050405020304" pitchFamily="18" charset="0"/>
                       </a:endParaRPr>
                     </a:p>
                   </a:txBody>
-                  <a:tcPr marL="27428" marR="27428" marT="0" marB="0"/>
+                  <a:tcPr marL="27428" marR="27428" marT="0" marB="0">
+                    <a:lnL w="12700" cap="flat" cmpd="sng" algn="ctr">
+                      <a:solidFill>
+                        <a:schemeClr val="tx1"/>
+                      </a:solidFill>
+                      <a:prstDash val="solid"/>
+                      <a:round/>
+                      <a:headEnd type="none" w="med" len="med"/>
+                      <a:tailEnd type="none" w="med" len="med"/>
+                    </a:lnL>
+                    <a:lnR w="12700" cap="flat" cmpd="sng" algn="ctr">
+                      <a:solidFill>
+                        <a:schemeClr val="tx1"/>
+                      </a:solidFill>
+                      <a:prstDash val="solid"/>
+                      <a:round/>
+                      <a:headEnd type="none" w="med" len="med"/>
+                      <a:tailEnd type="none" w="med" len="med"/>
+                    </a:lnR>
+                    <a:lnT w="12700" cap="flat" cmpd="sng" algn="ctr">
+                      <a:solidFill>
+                        <a:schemeClr val="tx1"/>
+                      </a:solidFill>
+                      <a:prstDash val="solid"/>
+                      <a:round/>
+                      <a:headEnd type="none" w="med" len="med"/>
+                      <a:tailEnd type="none" w="med" len="med"/>
+                    </a:lnT>
+                    <a:lnB w="12700" cap="flat" cmpd="sng" algn="ctr">
+                      <a:solidFill>
+                        <a:schemeClr val="tx1"/>
+                      </a:solidFill>
+                      <a:prstDash val="solid"/>
+                      <a:round/>
+                      <a:headEnd type="none" w="med" len="med"/>
+                      <a:tailEnd type="none" w="med" len="med"/>
+                    </a:lnB>
+                    <a:noFill/>
+                  </a:tcPr>
                 </a:tc>
                 <a:tc hMerge="1">
                   <a:txBody>
@@ -5162,18 +5303,62 @@
                       </a:pPr>
                       <a:r>
                         <a:rPr lang="en-US" sz="1100">
+                          <a:solidFill>
+                            <a:schemeClr val="tx1"/>
+                          </a:solidFill>
                           <a:effectLst/>
                         </a:rPr>
                         <a:t>1</a:t>
                       </a:r>
                       <a:endParaRPr lang="ru-RU" sz="1100">
+                        <a:solidFill>
+                          <a:schemeClr val="tx1"/>
+                        </a:solidFill>
                         <a:effectLst/>
                         <a:latin typeface="Times New Roman" panose="02020603050405020304" pitchFamily="18" charset="0"/>
                         <a:ea typeface="Times New Roman" panose="02020603050405020304" pitchFamily="18" charset="0"/>
                       </a:endParaRPr>
                     </a:p>
                   </a:txBody>
-                  <a:tcPr marL="27428" marR="27428" marT="0" marB="0"/>
+                  <a:tcPr marL="27428" marR="27428" marT="0" marB="0">
+                    <a:lnL w="12700" cap="flat" cmpd="sng" algn="ctr">
+                      <a:solidFill>
+                        <a:schemeClr val="tx1"/>
+                      </a:solidFill>
+                      <a:prstDash val="solid"/>
+                      <a:round/>
+                      <a:headEnd type="none" w="med" len="med"/>
+                      <a:tailEnd type="none" w="med" len="med"/>
+                    </a:lnL>
+                    <a:lnR w="12700" cap="flat" cmpd="sng" algn="ctr">
+                      <a:solidFill>
+                        <a:schemeClr val="tx1"/>
+                      </a:solidFill>
+                      <a:prstDash val="solid"/>
+                      <a:round/>
+                      <a:headEnd type="none" w="med" len="med"/>
+                      <a:tailEnd type="none" w="med" len="med"/>
+                    </a:lnR>
+                    <a:lnT w="12700" cap="flat" cmpd="sng" algn="ctr">
+                      <a:solidFill>
+                        <a:schemeClr val="tx1"/>
+                      </a:solidFill>
+                      <a:prstDash val="solid"/>
+                      <a:round/>
+                      <a:headEnd type="none" w="med" len="med"/>
+                      <a:tailEnd type="none" w="med" len="med"/>
+                    </a:lnT>
+                    <a:lnB w="12700" cap="flat" cmpd="sng" algn="ctr">
+                      <a:solidFill>
+                        <a:schemeClr val="tx1"/>
+                      </a:solidFill>
+                      <a:prstDash val="solid"/>
+                      <a:round/>
+                      <a:headEnd type="none" w="med" len="med"/>
+                      <a:tailEnd type="none" w="med" len="med"/>
+                    </a:lnB>
+                    <a:noFill/>
+                  </a:tcPr>
                 </a:tc>
                 <a:tc gridSpan="4">
                   <a:txBody>
@@ -5187,48 +5372,107 @@
                       </a:pPr>
                       <a:r>
                         <a:rPr lang="en-US" sz="1100" dirty="0" err="1">
+                          <a:solidFill>
+                            <a:schemeClr val="tx1"/>
+                          </a:solidFill>
                           <a:effectLst/>
                         </a:rPr>
                         <a:t>Получить</a:t>
                       </a:r>
                       <a:r>
                         <a:rPr lang="en-US" sz="1100" dirty="0">
+                          <a:solidFill>
+                            <a:schemeClr val="tx1"/>
+                          </a:solidFill>
                           <a:effectLst/>
                         </a:rPr>
                         <a:t> </a:t>
                       </a:r>
                       <a:r>
                         <a:rPr lang="en-US" sz="1100" dirty="0" err="1">
+                          <a:solidFill>
+                            <a:schemeClr val="tx1"/>
+                          </a:solidFill>
                           <a:effectLst/>
                         </a:rPr>
                         <a:t>категорию</a:t>
                       </a:r>
                       <a:r>
                         <a:rPr lang="en-US" sz="1100" dirty="0">
+                          <a:solidFill>
+                            <a:schemeClr val="tx1"/>
+                          </a:solidFill>
                           <a:effectLst/>
                         </a:rPr>
                         <a:t> </a:t>
                       </a:r>
                       <a:r>
                         <a:rPr lang="en-US" sz="1100" dirty="0" err="1">
+                          <a:solidFill>
+                            <a:schemeClr val="tx1"/>
+                          </a:solidFill>
                           <a:effectLst/>
                         </a:rPr>
                         <a:t>по</a:t>
                       </a:r>
                       <a:r>
                         <a:rPr lang="en-US" sz="1100" dirty="0">
+                          <a:solidFill>
+                            <a:schemeClr val="tx1"/>
+                          </a:solidFill>
                           <a:effectLst/>
                         </a:rPr>
                         <a:t> ID</a:t>
                       </a:r>
                       <a:endParaRPr lang="ru-RU" sz="1100" dirty="0">
+                        <a:solidFill>
+                          <a:schemeClr val="tx1"/>
+                        </a:solidFill>
                         <a:effectLst/>
                         <a:latin typeface="Times New Roman" panose="02020603050405020304" pitchFamily="18" charset="0"/>
                         <a:ea typeface="Times New Roman" panose="02020603050405020304" pitchFamily="18" charset="0"/>
                       </a:endParaRPr>
                     </a:p>
                   </a:txBody>
-                  <a:tcPr marL="27428" marR="27428" marT="0" marB="0"/>
+                  <a:tcPr marL="27428" marR="27428" marT="0" marB="0">
+                    <a:lnL w="12700" cap="flat" cmpd="sng" algn="ctr">
+                      <a:solidFill>
+                        <a:schemeClr val="tx1"/>
+                      </a:solidFill>
+                      <a:prstDash val="solid"/>
+                      <a:round/>
+                      <a:headEnd type="none" w="med" len="med"/>
+                      <a:tailEnd type="none" w="med" len="med"/>
+                    </a:lnL>
+                    <a:lnR w="12700" cap="flat" cmpd="sng" algn="ctr">
+                      <a:solidFill>
+                        <a:schemeClr val="tx1"/>
+                      </a:solidFill>
+                      <a:prstDash val="solid"/>
+                      <a:round/>
+                      <a:headEnd type="none" w="med" len="med"/>
+                      <a:tailEnd type="none" w="med" len="med"/>
+                    </a:lnR>
+                    <a:lnT w="12700" cap="flat" cmpd="sng" algn="ctr">
+                      <a:solidFill>
+                        <a:schemeClr val="tx1"/>
+                      </a:solidFill>
+                      <a:prstDash val="solid"/>
+                      <a:round/>
+                      <a:headEnd type="none" w="med" len="med"/>
+                      <a:tailEnd type="none" w="med" len="med"/>
+                    </a:lnT>
+                    <a:lnB w="12700" cap="flat" cmpd="sng" algn="ctr">
+                      <a:solidFill>
+                        <a:schemeClr val="tx1"/>
+                      </a:solidFill>
+                      <a:prstDash val="solid"/>
+                      <a:round/>
+                      <a:headEnd type="none" w="med" len="med"/>
+                      <a:tailEnd type="none" w="med" len="med"/>
+                    </a:lnB>
+                    <a:noFill/>
+                  </a:tcPr>
                 </a:tc>
                 <a:tc hMerge="1">
                   <a:txBody>
@@ -5272,18 +5516,62 @@
                       </a:pPr>
                       <a:r>
                         <a:rPr lang="ru-RU" sz="1100">
+                          <a:solidFill>
+                            <a:schemeClr val="tx1"/>
+                          </a:solidFill>
                           <a:effectLst/>
                         </a:rPr>
                         <a:t>Возвращает информацию о категории по её идентификатору.</a:t>
                       </a:r>
                       <a:endParaRPr lang="ru-RU" sz="1100">
+                        <a:solidFill>
+                          <a:schemeClr val="tx1"/>
+                        </a:solidFill>
                         <a:effectLst/>
                         <a:latin typeface="Times New Roman" panose="02020603050405020304" pitchFamily="18" charset="0"/>
                         <a:ea typeface="Times New Roman" panose="02020603050405020304" pitchFamily="18" charset="0"/>
                       </a:endParaRPr>
                     </a:p>
                   </a:txBody>
-                  <a:tcPr marL="27428" marR="27428" marT="0" marB="0"/>
+                  <a:tcPr marL="27428" marR="27428" marT="0" marB="0">
+                    <a:lnL w="12700" cap="flat" cmpd="sng" algn="ctr">
+                      <a:solidFill>
+                        <a:schemeClr val="tx1"/>
+                      </a:solidFill>
+                      <a:prstDash val="solid"/>
+                      <a:round/>
+                      <a:headEnd type="none" w="med" len="med"/>
+                      <a:tailEnd type="none" w="med" len="med"/>
+                    </a:lnL>
+                    <a:lnR w="12700" cap="flat" cmpd="sng" algn="ctr">
+                      <a:solidFill>
+                        <a:schemeClr val="tx1"/>
+                      </a:solidFill>
+                      <a:prstDash val="solid"/>
+                      <a:round/>
+                      <a:headEnd type="none" w="med" len="med"/>
+                      <a:tailEnd type="none" w="med" len="med"/>
+                    </a:lnR>
+                    <a:lnT w="12700" cap="flat" cmpd="sng" algn="ctr">
+                      <a:solidFill>
+                        <a:schemeClr val="tx1"/>
+                      </a:solidFill>
+                      <a:prstDash val="solid"/>
+                      <a:round/>
+                      <a:headEnd type="none" w="med" len="med"/>
+                      <a:tailEnd type="none" w="med" len="med"/>
+                    </a:lnT>
+                    <a:lnB w="12700" cap="flat" cmpd="sng" algn="ctr">
+                      <a:solidFill>
+                        <a:schemeClr val="tx1"/>
+                      </a:solidFill>
+                      <a:prstDash val="solid"/>
+                      <a:round/>
+                      <a:headEnd type="none" w="med" len="med"/>
+                      <a:tailEnd type="none" w="med" len="med"/>
+                    </a:lnB>
+                    <a:noFill/>
+                  </a:tcPr>
                 </a:tc>
                 <a:tc hMerge="1">
                   <a:txBody>
@@ -5323,18 +5611,62 @@
                       </a:pPr>
                       <a:r>
                         <a:rPr lang="en-US" sz="1100" dirty="0">
+                          <a:solidFill>
+                            <a:schemeClr val="tx1"/>
+                          </a:solidFill>
                           <a:effectLst/>
                         </a:rPr>
                         <a:t>ОПИСАНИЕ ЗАПРОСА</a:t>
                       </a:r>
                       <a:endParaRPr lang="ru-RU" sz="1100" dirty="0">
+                        <a:solidFill>
+                          <a:schemeClr val="tx1"/>
+                        </a:solidFill>
                         <a:effectLst/>
                         <a:latin typeface="Times New Roman" panose="02020603050405020304" pitchFamily="18" charset="0"/>
                         <a:ea typeface="Times New Roman" panose="02020603050405020304" pitchFamily="18" charset="0"/>
                       </a:endParaRPr>
                     </a:p>
                   </a:txBody>
-                  <a:tcPr marL="27428" marR="27428" marT="0" marB="0"/>
+                  <a:tcPr marL="27428" marR="27428" marT="0" marB="0">
+                    <a:lnL w="12700" cap="flat" cmpd="sng" algn="ctr">
+                      <a:solidFill>
+                        <a:schemeClr val="tx1"/>
+                      </a:solidFill>
+                      <a:prstDash val="solid"/>
+                      <a:round/>
+                      <a:headEnd type="none" w="med" len="med"/>
+                      <a:tailEnd type="none" w="med" len="med"/>
+                    </a:lnL>
+                    <a:lnR w="12700" cap="flat" cmpd="sng" algn="ctr">
+                      <a:solidFill>
+                        <a:schemeClr val="tx1"/>
+                      </a:solidFill>
+                      <a:prstDash val="solid"/>
+                      <a:round/>
+                      <a:headEnd type="none" w="med" len="med"/>
+                      <a:tailEnd type="none" w="med" len="med"/>
+                    </a:lnR>
+                    <a:lnT w="12700" cap="flat" cmpd="sng" algn="ctr">
+                      <a:solidFill>
+                        <a:schemeClr val="tx1"/>
+                      </a:solidFill>
+                      <a:prstDash val="solid"/>
+                      <a:round/>
+                      <a:headEnd type="none" w="med" len="med"/>
+                      <a:tailEnd type="none" w="med" len="med"/>
+                    </a:lnT>
+                    <a:lnB w="12700" cap="flat" cmpd="sng" algn="ctr">
+                      <a:solidFill>
+                        <a:schemeClr val="tx1"/>
+                      </a:solidFill>
+                      <a:prstDash val="solid"/>
+                      <a:round/>
+                      <a:headEnd type="none" w="med" len="med"/>
+                      <a:tailEnd type="none" w="med" len="med"/>
+                    </a:lnB>
+                    <a:noFill/>
+                  </a:tcPr>
                 </a:tc>
                 <a:tc hMerge="1">
                   <a:txBody>
@@ -5424,30 +5756,80 @@
                       </a:pPr>
                       <a:r>
                         <a:rPr lang="en-US" sz="1100" dirty="0" err="1">
+                          <a:solidFill>
+                            <a:schemeClr val="tx1"/>
+                          </a:solidFill>
                           <a:effectLst/>
                         </a:rPr>
                         <a:t>Название</a:t>
                       </a:r>
                       <a:r>
                         <a:rPr lang="en-US" sz="1100" dirty="0">
+                          <a:solidFill>
+                            <a:schemeClr val="tx1"/>
+                          </a:solidFill>
                           <a:effectLst/>
                         </a:rPr>
                         <a:t> </a:t>
                       </a:r>
                       <a:r>
                         <a:rPr lang="en-US" sz="1100" dirty="0" err="1">
+                          <a:solidFill>
+                            <a:schemeClr val="tx1"/>
+                          </a:solidFill>
                           <a:effectLst/>
                         </a:rPr>
                         <a:t>метода</a:t>
                       </a:r>
                       <a:endParaRPr lang="ru-RU" sz="1100" dirty="0">
+                        <a:solidFill>
+                          <a:schemeClr val="tx1"/>
+                        </a:solidFill>
                         <a:effectLst/>
                         <a:latin typeface="Times New Roman" panose="02020603050405020304" pitchFamily="18" charset="0"/>
                         <a:ea typeface="Times New Roman" panose="02020603050405020304" pitchFamily="18" charset="0"/>
                       </a:endParaRPr>
                     </a:p>
                   </a:txBody>
-                  <a:tcPr marL="27428" marR="27428" marT="0" marB="0"/>
+                  <a:tcPr marL="27428" marR="27428" marT="0" marB="0">
+                    <a:lnL w="12700" cap="flat" cmpd="sng" algn="ctr">
+                      <a:solidFill>
+                        <a:schemeClr val="tx1"/>
+                      </a:solidFill>
+                      <a:prstDash val="solid"/>
+                      <a:round/>
+                      <a:headEnd type="none" w="med" len="med"/>
+                      <a:tailEnd type="none" w="med" len="med"/>
+                    </a:lnL>
+                    <a:lnR w="12700" cap="flat" cmpd="sng" algn="ctr">
+                      <a:solidFill>
+                        <a:schemeClr val="tx1"/>
+                      </a:solidFill>
+                      <a:prstDash val="solid"/>
+                      <a:round/>
+                      <a:headEnd type="none" w="med" len="med"/>
+                      <a:tailEnd type="none" w="med" len="med"/>
+                    </a:lnR>
+                    <a:lnT w="12700" cap="flat" cmpd="sng" algn="ctr">
+                      <a:solidFill>
+                        <a:schemeClr val="tx1"/>
+                      </a:solidFill>
+                      <a:prstDash val="solid"/>
+                      <a:round/>
+                      <a:headEnd type="none" w="med" len="med"/>
+                      <a:tailEnd type="none" w="med" len="med"/>
+                    </a:lnT>
+                    <a:lnB w="12700" cap="flat" cmpd="sng" algn="ctr">
+                      <a:solidFill>
+                        <a:schemeClr val="tx1"/>
+                      </a:solidFill>
+                      <a:prstDash val="solid"/>
+                      <a:round/>
+                      <a:headEnd type="none" w="med" len="med"/>
+                      <a:tailEnd type="none" w="med" len="med"/>
+                    </a:lnB>
+                    <a:noFill/>
+                  </a:tcPr>
                 </a:tc>
                 <a:tc hMerge="1">
                   <a:txBody>
@@ -5471,18 +5853,62 @@
                       </a:pPr>
                       <a:r>
                         <a:rPr lang="en-US" sz="1100">
+                          <a:solidFill>
+                            <a:schemeClr val="tx1"/>
+                          </a:solidFill>
                           <a:effectLst/>
                         </a:rPr>
                         <a:t>Тип запроса</a:t>
                       </a:r>
                       <a:endParaRPr lang="ru-RU" sz="1100">
+                        <a:solidFill>
+                          <a:schemeClr val="tx1"/>
+                        </a:solidFill>
                         <a:effectLst/>
                         <a:latin typeface="Times New Roman" panose="02020603050405020304" pitchFamily="18" charset="0"/>
                         <a:ea typeface="Times New Roman" panose="02020603050405020304" pitchFamily="18" charset="0"/>
                       </a:endParaRPr>
                     </a:p>
                   </a:txBody>
-                  <a:tcPr marL="27428" marR="27428" marT="0" marB="0"/>
+                  <a:tcPr marL="27428" marR="27428" marT="0" marB="0">
+                    <a:lnL w="12700" cap="flat" cmpd="sng" algn="ctr">
+                      <a:solidFill>
+                        <a:schemeClr val="tx1"/>
+                      </a:solidFill>
+                      <a:prstDash val="solid"/>
+                      <a:round/>
+                      <a:headEnd type="none" w="med" len="med"/>
+                      <a:tailEnd type="none" w="med" len="med"/>
+                    </a:lnL>
+                    <a:lnR w="12700" cap="flat" cmpd="sng" algn="ctr">
+                      <a:solidFill>
+                        <a:schemeClr val="tx1"/>
+                      </a:solidFill>
+                      <a:prstDash val="solid"/>
+                      <a:round/>
+                      <a:headEnd type="none" w="med" len="med"/>
+                      <a:tailEnd type="none" w="med" len="med"/>
+                    </a:lnR>
+                    <a:lnT w="12700" cap="flat" cmpd="sng" algn="ctr">
+                      <a:solidFill>
+                        <a:schemeClr val="tx1"/>
+                      </a:solidFill>
+                      <a:prstDash val="solid"/>
+                      <a:round/>
+                      <a:headEnd type="none" w="med" len="med"/>
+                      <a:tailEnd type="none" w="med" len="med"/>
+                    </a:lnT>
+                    <a:lnB w="12700" cap="flat" cmpd="sng" algn="ctr">
+                      <a:solidFill>
+                        <a:schemeClr val="tx1"/>
+                      </a:solidFill>
+                      <a:prstDash val="solid"/>
+                      <a:round/>
+                      <a:headEnd type="none" w="med" len="med"/>
+                      <a:tailEnd type="none" w="med" len="med"/>
+                    </a:lnB>
+                    <a:noFill/>
+                  </a:tcPr>
                 </a:tc>
                 <a:tc hMerge="1">
                   <a:txBody>
@@ -5505,19 +5931,63 @@
                         </a:spcAft>
                       </a:pPr>
                       <a:r>
-                        <a:rPr lang="en-US" sz="1100">
+                        <a:rPr lang="en-US" sz="1100" dirty="0">
+                          <a:solidFill>
+                            <a:schemeClr val="tx1"/>
+                          </a:solidFill>
                           <a:effectLst/>
                         </a:rPr>
                         <a:t>Endpoint</a:t>
                       </a:r>
-                      <a:endParaRPr lang="ru-RU" sz="1100">
+                      <a:endParaRPr lang="ru-RU" sz="1100" dirty="0">
+                        <a:solidFill>
+                          <a:schemeClr val="tx1"/>
+                        </a:solidFill>
                         <a:effectLst/>
                         <a:latin typeface="Times New Roman" panose="02020603050405020304" pitchFamily="18" charset="0"/>
                         <a:ea typeface="Times New Roman" panose="02020603050405020304" pitchFamily="18" charset="0"/>
                       </a:endParaRPr>
                     </a:p>
                   </a:txBody>
-                  <a:tcPr marL="27428" marR="27428" marT="0" marB="0"/>
+                  <a:tcPr marL="27428" marR="27428" marT="0" marB="0">
+                    <a:lnL w="12700" cap="flat" cmpd="sng" algn="ctr">
+                      <a:solidFill>
+                        <a:schemeClr val="tx1"/>
+                      </a:solidFill>
+                      <a:prstDash val="solid"/>
+                      <a:round/>
+                      <a:headEnd type="none" w="med" len="med"/>
+                      <a:tailEnd type="none" w="med" len="med"/>
+                    </a:lnL>
+                    <a:lnR w="12700" cap="flat" cmpd="sng" algn="ctr">
+                      <a:solidFill>
+                        <a:schemeClr val="tx1"/>
+                      </a:solidFill>
+                      <a:prstDash val="solid"/>
+                      <a:round/>
+                      <a:headEnd type="none" w="med" len="med"/>
+                      <a:tailEnd type="none" w="med" len="med"/>
+                    </a:lnR>
+                    <a:lnT w="12700" cap="flat" cmpd="sng" algn="ctr">
+                      <a:solidFill>
+                        <a:schemeClr val="tx1"/>
+                      </a:solidFill>
+                      <a:prstDash val="solid"/>
+                      <a:round/>
+                      <a:headEnd type="none" w="med" len="med"/>
+                      <a:tailEnd type="none" w="med" len="med"/>
+                    </a:lnT>
+                    <a:lnB w="12700" cap="flat" cmpd="sng" algn="ctr">
+                      <a:solidFill>
+                        <a:schemeClr val="tx1"/>
+                      </a:solidFill>
+                      <a:prstDash val="solid"/>
+                      <a:round/>
+                      <a:headEnd type="none" w="med" len="med"/>
+                      <a:tailEnd type="none" w="med" len="med"/>
+                    </a:lnB>
+                    <a:noFill/>
+                  </a:tcPr>
                 </a:tc>
                 <a:tc hMerge="1">
                   <a:txBody>
@@ -5567,18 +6037,62 @@
                       </a:pPr>
                       <a:r>
                         <a:rPr lang="en-US" sz="1100" dirty="0" err="1">
+                          <a:solidFill>
+                            <a:schemeClr val="tx1"/>
+                          </a:solidFill>
                           <a:effectLst/>
                         </a:rPr>
                         <a:t>getCategory</a:t>
                       </a:r>
                       <a:endParaRPr lang="ru-RU" sz="1100" dirty="0">
+                        <a:solidFill>
+                          <a:schemeClr val="tx1"/>
+                        </a:solidFill>
                         <a:effectLst/>
                         <a:latin typeface="Times New Roman" panose="02020603050405020304" pitchFamily="18" charset="0"/>
                         <a:ea typeface="Times New Roman" panose="02020603050405020304" pitchFamily="18" charset="0"/>
                       </a:endParaRPr>
                     </a:p>
                   </a:txBody>
-                  <a:tcPr marL="27428" marR="27428" marT="0" marB="0"/>
+                  <a:tcPr marL="27428" marR="27428" marT="0" marB="0">
+                    <a:lnL w="12700" cap="flat" cmpd="sng" algn="ctr">
+                      <a:solidFill>
+                        <a:schemeClr val="tx1"/>
+                      </a:solidFill>
+                      <a:prstDash val="solid"/>
+                      <a:round/>
+                      <a:headEnd type="none" w="med" len="med"/>
+                      <a:tailEnd type="none" w="med" len="med"/>
+                    </a:lnL>
+                    <a:lnR w="12700" cap="flat" cmpd="sng" algn="ctr">
+                      <a:solidFill>
+                        <a:schemeClr val="tx1"/>
+                      </a:solidFill>
+                      <a:prstDash val="solid"/>
+                      <a:round/>
+                      <a:headEnd type="none" w="med" len="med"/>
+                      <a:tailEnd type="none" w="med" len="med"/>
+                    </a:lnR>
+                    <a:lnT w="12700" cap="flat" cmpd="sng" algn="ctr">
+                      <a:solidFill>
+                        <a:schemeClr val="tx1"/>
+                      </a:solidFill>
+                      <a:prstDash val="solid"/>
+                      <a:round/>
+                      <a:headEnd type="none" w="med" len="med"/>
+                      <a:tailEnd type="none" w="med" len="med"/>
+                    </a:lnT>
+                    <a:lnB w="12700" cap="flat" cmpd="sng" algn="ctr">
+                      <a:solidFill>
+                        <a:schemeClr val="tx1"/>
+                      </a:solidFill>
+                      <a:prstDash val="solid"/>
+                      <a:round/>
+                      <a:headEnd type="none" w="med" len="med"/>
+                      <a:tailEnd type="none" w="med" len="med"/>
+                    </a:lnB>
+                    <a:noFill/>
+                  </a:tcPr>
                 </a:tc>
                 <a:tc hMerge="1">
                   <a:txBody>
@@ -5602,18 +6116,62 @@
                       </a:pPr>
                       <a:r>
                         <a:rPr lang="en-US" sz="1100">
+                          <a:solidFill>
+                            <a:schemeClr val="tx1"/>
+                          </a:solidFill>
                           <a:effectLst/>
                         </a:rPr>
                         <a:t>GET</a:t>
                       </a:r>
                       <a:endParaRPr lang="ru-RU" sz="1100">
+                        <a:solidFill>
+                          <a:schemeClr val="tx1"/>
+                        </a:solidFill>
                         <a:effectLst/>
                         <a:latin typeface="Times New Roman" panose="02020603050405020304" pitchFamily="18" charset="0"/>
                         <a:ea typeface="Times New Roman" panose="02020603050405020304" pitchFamily="18" charset="0"/>
                       </a:endParaRPr>
                     </a:p>
                   </a:txBody>
-                  <a:tcPr marL="27428" marR="27428" marT="0" marB="0"/>
+                  <a:tcPr marL="27428" marR="27428" marT="0" marB="0">
+                    <a:lnL w="12700" cap="flat" cmpd="sng" algn="ctr">
+                      <a:solidFill>
+                        <a:schemeClr val="tx1"/>
+                      </a:solidFill>
+                      <a:prstDash val="solid"/>
+                      <a:round/>
+                      <a:headEnd type="none" w="med" len="med"/>
+                      <a:tailEnd type="none" w="med" len="med"/>
+                    </a:lnL>
+                    <a:lnR w="12700" cap="flat" cmpd="sng" algn="ctr">
+                      <a:solidFill>
+                        <a:schemeClr val="tx1"/>
+                      </a:solidFill>
+                      <a:prstDash val="solid"/>
+                      <a:round/>
+                      <a:headEnd type="none" w="med" len="med"/>
+                      <a:tailEnd type="none" w="med" len="med"/>
+                    </a:lnR>
+                    <a:lnT w="12700" cap="flat" cmpd="sng" algn="ctr">
+                      <a:solidFill>
+                        <a:schemeClr val="tx1"/>
+                      </a:solidFill>
+                      <a:prstDash val="solid"/>
+                      <a:round/>
+                      <a:headEnd type="none" w="med" len="med"/>
+                      <a:tailEnd type="none" w="med" len="med"/>
+                    </a:lnT>
+                    <a:lnB w="12700" cap="flat" cmpd="sng" algn="ctr">
+                      <a:solidFill>
+                        <a:schemeClr val="tx1"/>
+                      </a:solidFill>
+                      <a:prstDash val="solid"/>
+                      <a:round/>
+                      <a:headEnd type="none" w="med" len="med"/>
+                      <a:tailEnd type="none" w="med" len="med"/>
+                    </a:lnB>
+                    <a:noFill/>
+                  </a:tcPr>
                 </a:tc>
                 <a:tc hMerge="1">
                   <a:txBody>
@@ -5637,18 +6195,62 @@
                       </a:pPr>
                       <a:r>
                         <a:rPr lang="en-US" sz="1100">
+                          <a:solidFill>
+                            <a:schemeClr val="tx1"/>
+                          </a:solidFill>
                           <a:effectLst/>
                         </a:rPr>
                         <a:t>http://192.168.0.38:8080/vag/api/mobile/categories/{id}</a:t>
                       </a:r>
                       <a:endParaRPr lang="ru-RU" sz="1100">
+                        <a:solidFill>
+                          <a:schemeClr val="tx1"/>
+                        </a:solidFill>
                         <a:effectLst/>
                         <a:latin typeface="Times New Roman" panose="02020603050405020304" pitchFamily="18" charset="0"/>
                         <a:ea typeface="Times New Roman" panose="02020603050405020304" pitchFamily="18" charset="0"/>
                       </a:endParaRPr>
                     </a:p>
                   </a:txBody>
-                  <a:tcPr marL="27428" marR="27428" marT="0" marB="0"/>
+                  <a:tcPr marL="27428" marR="27428" marT="0" marB="0">
+                    <a:lnL w="12700" cap="flat" cmpd="sng" algn="ctr">
+                      <a:solidFill>
+                        <a:schemeClr val="tx1"/>
+                      </a:solidFill>
+                      <a:prstDash val="solid"/>
+                      <a:round/>
+                      <a:headEnd type="none" w="med" len="med"/>
+                      <a:tailEnd type="none" w="med" len="med"/>
+                    </a:lnL>
+                    <a:lnR w="12700" cap="flat" cmpd="sng" algn="ctr">
+                      <a:solidFill>
+                        <a:schemeClr val="tx1"/>
+                      </a:solidFill>
+                      <a:prstDash val="solid"/>
+                      <a:round/>
+                      <a:headEnd type="none" w="med" len="med"/>
+                      <a:tailEnd type="none" w="med" len="med"/>
+                    </a:lnR>
+                    <a:lnT w="12700" cap="flat" cmpd="sng" algn="ctr">
+                      <a:solidFill>
+                        <a:schemeClr val="tx1"/>
+                      </a:solidFill>
+                      <a:prstDash val="solid"/>
+                      <a:round/>
+                      <a:headEnd type="none" w="med" len="med"/>
+                      <a:tailEnd type="none" w="med" len="med"/>
+                    </a:lnT>
+                    <a:lnB w="12700" cap="flat" cmpd="sng" algn="ctr">
+                      <a:solidFill>
+                        <a:schemeClr val="tx1"/>
+                      </a:solidFill>
+                      <a:prstDash val="solid"/>
+                      <a:round/>
+                      <a:headEnd type="none" w="med" len="med"/>
+                      <a:tailEnd type="none" w="med" len="med"/>
+                    </a:lnB>
+                    <a:noFill/>
+                  </a:tcPr>
                 </a:tc>
                 <a:tc hMerge="1">
                   <a:txBody>
@@ -5698,18 +6300,62 @@
                       </a:pPr>
                       <a:r>
                         <a:rPr lang="en-US" sz="1100" dirty="0">
+                          <a:solidFill>
+                            <a:schemeClr val="tx1"/>
+                          </a:solidFill>
                           <a:effectLst/>
                         </a:rPr>
                         <a:t>ПРИМЕР</a:t>
                       </a:r>
                       <a:endParaRPr lang="ru-RU" sz="1100" dirty="0">
+                        <a:solidFill>
+                          <a:schemeClr val="tx1"/>
+                        </a:solidFill>
                         <a:effectLst/>
                         <a:latin typeface="Times New Roman" panose="02020603050405020304" pitchFamily="18" charset="0"/>
                         <a:ea typeface="Times New Roman" panose="02020603050405020304" pitchFamily="18" charset="0"/>
                       </a:endParaRPr>
                     </a:p>
                   </a:txBody>
-                  <a:tcPr marL="27428" marR="27428" marT="0" marB="0"/>
+                  <a:tcPr marL="27428" marR="27428" marT="0" marB="0">
+                    <a:lnL w="12700" cap="flat" cmpd="sng" algn="ctr">
+                      <a:solidFill>
+                        <a:schemeClr val="tx1"/>
+                      </a:solidFill>
+                      <a:prstDash val="solid"/>
+                      <a:round/>
+                      <a:headEnd type="none" w="med" len="med"/>
+                      <a:tailEnd type="none" w="med" len="med"/>
+                    </a:lnL>
+                    <a:lnR w="12700" cap="flat" cmpd="sng" algn="ctr">
+                      <a:solidFill>
+                        <a:schemeClr val="tx1"/>
+                      </a:solidFill>
+                      <a:prstDash val="solid"/>
+                      <a:round/>
+                      <a:headEnd type="none" w="med" len="med"/>
+                      <a:tailEnd type="none" w="med" len="med"/>
+                    </a:lnR>
+                    <a:lnT w="12700" cap="flat" cmpd="sng" algn="ctr">
+                      <a:solidFill>
+                        <a:schemeClr val="tx1"/>
+                      </a:solidFill>
+                      <a:prstDash val="solid"/>
+                      <a:round/>
+                      <a:headEnd type="none" w="med" len="med"/>
+                      <a:tailEnd type="none" w="med" len="med"/>
+                    </a:lnT>
+                    <a:lnB w="12700" cap="flat" cmpd="sng" algn="ctr">
+                      <a:solidFill>
+                        <a:schemeClr val="tx1"/>
+                      </a:solidFill>
+                      <a:prstDash val="solid"/>
+                      <a:round/>
+                      <a:headEnd type="none" w="med" len="med"/>
+                      <a:tailEnd type="none" w="med" len="med"/>
+                    </a:lnB>
+                    <a:noFill/>
+                  </a:tcPr>
                 </a:tc>
                 <a:tc hMerge="1">
                   <a:txBody>
@@ -5799,18 +6445,62 @@
                       </a:pPr>
                       <a:r>
                         <a:rPr lang="en-US" sz="1100" dirty="0">
+                          <a:solidFill>
+                            <a:schemeClr val="tx1"/>
+                          </a:solidFill>
                           <a:effectLst/>
                         </a:rPr>
                         <a:t>http://192.168.0.38:8080/vag/api/mobile/categories/3</a:t>
                       </a:r>
                       <a:endParaRPr lang="ru-RU" sz="1100" dirty="0">
+                        <a:solidFill>
+                          <a:schemeClr val="tx1"/>
+                        </a:solidFill>
                         <a:effectLst/>
                         <a:latin typeface="Times New Roman" panose="02020603050405020304" pitchFamily="18" charset="0"/>
                         <a:ea typeface="Times New Roman" panose="02020603050405020304" pitchFamily="18" charset="0"/>
                       </a:endParaRPr>
                     </a:p>
                   </a:txBody>
-                  <a:tcPr marL="27428" marR="27428" marT="0" marB="0"/>
+                  <a:tcPr marL="27428" marR="27428" marT="0" marB="0">
+                    <a:lnL w="12700" cap="flat" cmpd="sng" algn="ctr">
+                      <a:solidFill>
+                        <a:schemeClr val="tx1"/>
+                      </a:solidFill>
+                      <a:prstDash val="solid"/>
+                      <a:round/>
+                      <a:headEnd type="none" w="med" len="med"/>
+                      <a:tailEnd type="none" w="med" len="med"/>
+                    </a:lnL>
+                    <a:lnR w="12700" cap="flat" cmpd="sng" algn="ctr">
+                      <a:solidFill>
+                        <a:schemeClr val="tx1"/>
+                      </a:solidFill>
+                      <a:prstDash val="solid"/>
+                      <a:round/>
+                      <a:headEnd type="none" w="med" len="med"/>
+                      <a:tailEnd type="none" w="med" len="med"/>
+                    </a:lnR>
+                    <a:lnT w="12700" cap="flat" cmpd="sng" algn="ctr">
+                      <a:solidFill>
+                        <a:schemeClr val="tx1"/>
+                      </a:solidFill>
+                      <a:prstDash val="solid"/>
+                      <a:round/>
+                      <a:headEnd type="none" w="med" len="med"/>
+                      <a:tailEnd type="none" w="med" len="med"/>
+                    </a:lnT>
+                    <a:lnB w="12700" cap="flat" cmpd="sng" algn="ctr">
+                      <a:solidFill>
+                        <a:schemeClr val="tx1"/>
+                      </a:solidFill>
+                      <a:prstDash val="solid"/>
+                      <a:round/>
+                      <a:headEnd type="none" w="med" len="med"/>
+                      <a:tailEnd type="none" w="med" len="med"/>
+                    </a:lnB>
+                    <a:noFill/>
+                  </a:tcPr>
                 </a:tc>
                 <a:tc hMerge="1">
                   <a:txBody>
@@ -5900,18 +6590,62 @@
                       </a:pPr>
                       <a:r>
                         <a:rPr lang="en-US" sz="1100" dirty="0">
+                          <a:solidFill>
+                            <a:schemeClr val="tx1"/>
+                          </a:solidFill>
                           <a:effectLst/>
                         </a:rPr>
                         <a:t>ПАРАМЕТРЫ ЗАПРОСА</a:t>
                       </a:r>
                       <a:endParaRPr lang="ru-RU" sz="1100" dirty="0">
+                        <a:solidFill>
+                          <a:schemeClr val="tx1"/>
+                        </a:solidFill>
                         <a:effectLst/>
                         <a:latin typeface="Times New Roman" panose="02020603050405020304" pitchFamily="18" charset="0"/>
                         <a:ea typeface="Times New Roman" panose="02020603050405020304" pitchFamily="18" charset="0"/>
                       </a:endParaRPr>
                     </a:p>
                   </a:txBody>
-                  <a:tcPr marL="27428" marR="27428" marT="0" marB="0"/>
+                  <a:tcPr marL="27428" marR="27428" marT="0" marB="0">
+                    <a:lnL w="12700" cap="flat" cmpd="sng" algn="ctr">
+                      <a:solidFill>
+                        <a:schemeClr val="tx1"/>
+                      </a:solidFill>
+                      <a:prstDash val="solid"/>
+                      <a:round/>
+                      <a:headEnd type="none" w="med" len="med"/>
+                      <a:tailEnd type="none" w="med" len="med"/>
+                    </a:lnL>
+                    <a:lnR w="12700" cap="flat" cmpd="sng" algn="ctr">
+                      <a:solidFill>
+                        <a:schemeClr val="tx1"/>
+                      </a:solidFill>
+                      <a:prstDash val="solid"/>
+                      <a:round/>
+                      <a:headEnd type="none" w="med" len="med"/>
+                      <a:tailEnd type="none" w="med" len="med"/>
+                    </a:lnR>
+                    <a:lnT w="12700" cap="flat" cmpd="sng" algn="ctr">
+                      <a:solidFill>
+                        <a:schemeClr val="tx1"/>
+                      </a:solidFill>
+                      <a:prstDash val="solid"/>
+                      <a:round/>
+                      <a:headEnd type="none" w="med" len="med"/>
+                      <a:tailEnd type="none" w="med" len="med"/>
+                    </a:lnT>
+                    <a:lnB w="12700" cap="flat" cmpd="sng" algn="ctr">
+                      <a:solidFill>
+                        <a:schemeClr val="tx1"/>
+                      </a:solidFill>
+                      <a:prstDash val="solid"/>
+                      <a:round/>
+                      <a:headEnd type="none" w="med" len="med"/>
+                      <a:tailEnd type="none" w="med" len="med"/>
+                    </a:lnB>
+                    <a:noFill/>
+                  </a:tcPr>
                 </a:tc>
                 <a:tc hMerge="1">
                   <a:txBody>
@@ -6001,18 +6735,62 @@
                       </a:pPr>
                       <a:r>
                         <a:rPr lang="en-US" sz="1100">
+                          <a:solidFill>
+                            <a:schemeClr val="tx1"/>
+                          </a:solidFill>
                           <a:effectLst/>
                         </a:rPr>
                         <a:t>№</a:t>
                       </a:r>
                       <a:endParaRPr lang="ru-RU" sz="1100">
+                        <a:solidFill>
+                          <a:schemeClr val="tx1"/>
+                        </a:solidFill>
                         <a:effectLst/>
                         <a:latin typeface="Times New Roman" panose="02020603050405020304" pitchFamily="18" charset="0"/>
                         <a:ea typeface="Times New Roman" panose="02020603050405020304" pitchFamily="18" charset="0"/>
                       </a:endParaRPr>
                     </a:p>
                   </a:txBody>
-                  <a:tcPr marL="27428" marR="27428" marT="0" marB="0"/>
+                  <a:tcPr marL="27428" marR="27428" marT="0" marB="0">
+                    <a:lnL w="12700" cap="flat" cmpd="sng" algn="ctr">
+                      <a:solidFill>
+                        <a:schemeClr val="tx1"/>
+                      </a:solidFill>
+                      <a:prstDash val="solid"/>
+                      <a:round/>
+                      <a:headEnd type="none" w="med" len="med"/>
+                      <a:tailEnd type="none" w="med" len="med"/>
+                    </a:lnL>
+                    <a:lnR w="12700" cap="flat" cmpd="sng" algn="ctr">
+                      <a:solidFill>
+                        <a:schemeClr val="tx1"/>
+                      </a:solidFill>
+                      <a:prstDash val="solid"/>
+                      <a:round/>
+                      <a:headEnd type="none" w="med" len="med"/>
+                      <a:tailEnd type="none" w="med" len="med"/>
+                    </a:lnR>
+                    <a:lnT w="12700" cap="flat" cmpd="sng" algn="ctr">
+                      <a:solidFill>
+                        <a:schemeClr val="tx1"/>
+                      </a:solidFill>
+                      <a:prstDash val="solid"/>
+                      <a:round/>
+                      <a:headEnd type="none" w="med" len="med"/>
+                      <a:tailEnd type="none" w="med" len="med"/>
+                    </a:lnT>
+                    <a:lnB w="12700" cap="flat" cmpd="sng" algn="ctr">
+                      <a:solidFill>
+                        <a:schemeClr val="tx1"/>
+                      </a:solidFill>
+                      <a:prstDash val="solid"/>
+                      <a:round/>
+                      <a:headEnd type="none" w="med" len="med"/>
+                      <a:tailEnd type="none" w="med" len="med"/>
+                    </a:lnB>
+                    <a:noFill/>
+                  </a:tcPr>
                 </a:tc>
                 <a:tc gridSpan="2">
                   <a:txBody>
@@ -6021,26 +6799,77 @@
                     <a:p>
                       <a:r>
                         <a:rPr lang="en-US" sz="1100" dirty="0" err="1">
+                          <a:solidFill>
+                            <a:schemeClr val="tx1"/>
+                          </a:solidFill>
                           <a:effectLst/>
                         </a:rPr>
                         <a:t>Метка</a:t>
                       </a:r>
                       <a:r>
                         <a:rPr lang="en-US" sz="1100" dirty="0">
+                          <a:solidFill>
+                            <a:schemeClr val="tx1"/>
+                          </a:solidFill>
                           <a:effectLst/>
                         </a:rPr>
                         <a:t> </a:t>
                       </a:r>
                       <a:r>
                         <a:rPr lang="en-US" sz="1100" dirty="0" err="1">
+                          <a:solidFill>
+                            <a:schemeClr val="tx1"/>
+                          </a:solidFill>
                           <a:effectLst/>
                         </a:rPr>
                         <a:t>атрибута</a:t>
                       </a:r>
-                      <a:endParaRPr lang="ru-RU" sz="4400" dirty="0"/>
+                      <a:endParaRPr lang="ru-RU" sz="4400" dirty="0">
+                        <a:solidFill>
+                          <a:schemeClr val="tx1"/>
+                        </a:solidFill>
+                      </a:endParaRPr>
                     </a:p>
                   </a:txBody>
-                  <a:tcPr marL="27428" marR="27428" marT="0" marB="0"/>
+                  <a:tcPr marL="27428" marR="27428" marT="0" marB="0">
+                    <a:lnL w="12700" cap="flat" cmpd="sng" algn="ctr">
+                      <a:solidFill>
+                        <a:schemeClr val="tx1"/>
+                      </a:solidFill>
+                      <a:prstDash val="solid"/>
+                      <a:round/>
+                      <a:headEnd type="none" w="med" len="med"/>
+                      <a:tailEnd type="none" w="med" len="med"/>
+                    </a:lnL>
+                    <a:lnR w="12700" cap="flat" cmpd="sng" algn="ctr">
+                      <a:solidFill>
+                        <a:schemeClr val="tx1"/>
+                      </a:solidFill>
+                      <a:prstDash val="solid"/>
+                      <a:round/>
+                      <a:headEnd type="none" w="med" len="med"/>
+                      <a:tailEnd type="none" w="med" len="med"/>
+                    </a:lnR>
+                    <a:lnT w="12700" cap="flat" cmpd="sng" algn="ctr">
+                      <a:solidFill>
+                        <a:schemeClr val="tx1"/>
+                      </a:solidFill>
+                      <a:prstDash val="solid"/>
+                      <a:round/>
+                      <a:headEnd type="none" w="med" len="med"/>
+                      <a:tailEnd type="none" w="med" len="med"/>
+                    </a:lnT>
+                    <a:lnB w="12700" cap="flat" cmpd="sng" algn="ctr">
+                      <a:solidFill>
+                        <a:schemeClr val="tx1"/>
+                      </a:solidFill>
+                      <a:prstDash val="solid"/>
+                      <a:round/>
+                      <a:headEnd type="none" w="med" len="med"/>
+                      <a:tailEnd type="none" w="med" len="med"/>
+                    </a:lnB>
+                    <a:noFill/>
+                  </a:tcPr>
                 </a:tc>
                 <a:tc hMerge="1">
                   <a:txBody>
@@ -6059,14 +6888,59 @@
                     <a:p>
                       <a:r>
                         <a:rPr lang="en-US" sz="1100">
+                          <a:solidFill>
+                            <a:schemeClr val="tx1"/>
+                          </a:solidFill>
                           <a:effectLst/>
                         </a:rPr>
                         <a:t>Обязат.</a:t>
                       </a:r>
-                      <a:endParaRPr lang="ru-RU"/>
+                      <a:endParaRPr lang="ru-RU">
+                        <a:solidFill>
+                          <a:schemeClr val="tx1"/>
+                        </a:solidFill>
+                      </a:endParaRPr>
                     </a:p>
                   </a:txBody>
-                  <a:tcPr marL="27428" marR="27428" marT="0" marB="0"/>
+                  <a:tcPr marL="27428" marR="27428" marT="0" marB="0">
+                    <a:lnL w="12700" cap="flat" cmpd="sng" algn="ctr">
+                      <a:solidFill>
+                        <a:schemeClr val="tx1"/>
+                      </a:solidFill>
+                      <a:prstDash val="solid"/>
+                      <a:round/>
+                      <a:headEnd type="none" w="med" len="med"/>
+                      <a:tailEnd type="none" w="med" len="med"/>
+                    </a:lnL>
+                    <a:lnR w="12700" cap="flat" cmpd="sng" algn="ctr">
+                      <a:solidFill>
+                        <a:schemeClr val="tx1"/>
+                      </a:solidFill>
+                      <a:prstDash val="solid"/>
+                      <a:round/>
+                      <a:headEnd type="none" w="med" len="med"/>
+                      <a:tailEnd type="none" w="med" len="med"/>
+                    </a:lnR>
+                    <a:lnT w="12700" cap="flat" cmpd="sng" algn="ctr">
+                      <a:solidFill>
+                        <a:schemeClr val="tx1"/>
+                      </a:solidFill>
+                      <a:prstDash val="solid"/>
+                      <a:round/>
+                      <a:headEnd type="none" w="med" len="med"/>
+                      <a:tailEnd type="none" w="med" len="med"/>
+                    </a:lnT>
+                    <a:lnB w="12700" cap="flat" cmpd="sng" algn="ctr">
+                      <a:solidFill>
+                        <a:schemeClr val="tx1"/>
+                      </a:solidFill>
+                      <a:prstDash val="solid"/>
+                      <a:round/>
+                      <a:headEnd type="none" w="med" len="med"/>
+                      <a:tailEnd type="none" w="med" len="med"/>
+                    </a:lnB>
+                    <a:noFill/>
+                  </a:tcPr>
                 </a:tc>
                 <a:tc gridSpan="2">
                   <a:txBody>
@@ -6075,14 +6949,59 @@
                     <a:p>
                       <a:r>
                         <a:rPr lang="en-US" sz="1100">
+                          <a:solidFill>
+                            <a:schemeClr val="tx1"/>
+                          </a:solidFill>
                           <a:effectLst/>
                         </a:rPr>
                         <a:t>Формат атрибута</a:t>
                       </a:r>
-                      <a:endParaRPr lang="ru-RU"/>
+                      <a:endParaRPr lang="ru-RU">
+                        <a:solidFill>
+                          <a:schemeClr val="tx1"/>
+                        </a:solidFill>
+                      </a:endParaRPr>
                     </a:p>
                   </a:txBody>
-                  <a:tcPr marL="27428" marR="27428" marT="0" marB="0"/>
+                  <a:tcPr marL="27428" marR="27428" marT="0" marB="0">
+                    <a:lnL w="12700" cap="flat" cmpd="sng" algn="ctr">
+                      <a:solidFill>
+                        <a:schemeClr val="tx1"/>
+                      </a:solidFill>
+                      <a:prstDash val="solid"/>
+                      <a:round/>
+                      <a:headEnd type="none" w="med" len="med"/>
+                      <a:tailEnd type="none" w="med" len="med"/>
+                    </a:lnL>
+                    <a:lnR w="12700" cap="flat" cmpd="sng" algn="ctr">
+                      <a:solidFill>
+                        <a:schemeClr val="tx1"/>
+                      </a:solidFill>
+                      <a:prstDash val="solid"/>
+                      <a:round/>
+                      <a:headEnd type="none" w="med" len="med"/>
+                      <a:tailEnd type="none" w="med" len="med"/>
+                    </a:lnR>
+                    <a:lnT w="12700" cap="flat" cmpd="sng" algn="ctr">
+                      <a:solidFill>
+                        <a:schemeClr val="tx1"/>
+                      </a:solidFill>
+                      <a:prstDash val="solid"/>
+                      <a:round/>
+                      <a:headEnd type="none" w="med" len="med"/>
+                      <a:tailEnd type="none" w="med" len="med"/>
+                    </a:lnT>
+                    <a:lnB w="12700" cap="flat" cmpd="sng" algn="ctr">
+                      <a:solidFill>
+                        <a:schemeClr val="tx1"/>
+                      </a:solidFill>
+                      <a:prstDash val="solid"/>
+                      <a:round/>
+                      <a:headEnd type="none" w="med" len="med"/>
+                      <a:tailEnd type="none" w="med" len="med"/>
+                    </a:lnB>
+                    <a:noFill/>
+                  </a:tcPr>
                 </a:tc>
                 <a:tc hMerge="1">
                   <a:txBody>
@@ -6106,18 +7025,62 @@
                       </a:pPr>
                       <a:r>
                         <a:rPr lang="en-US" sz="1100">
+                          <a:solidFill>
+                            <a:schemeClr val="tx1"/>
+                          </a:solidFill>
                           <a:effectLst/>
                         </a:rPr>
                         <a:t>Пример</a:t>
                       </a:r>
                       <a:endParaRPr lang="ru-RU" sz="1100">
+                        <a:solidFill>
+                          <a:schemeClr val="tx1"/>
+                        </a:solidFill>
                         <a:effectLst/>
                         <a:latin typeface="Times New Roman" panose="02020603050405020304" pitchFamily="18" charset="0"/>
                         <a:ea typeface="Times New Roman" panose="02020603050405020304" pitchFamily="18" charset="0"/>
                       </a:endParaRPr>
                     </a:p>
                   </a:txBody>
-                  <a:tcPr marL="27428" marR="27428" marT="0" marB="0"/>
+                  <a:tcPr marL="27428" marR="27428" marT="0" marB="0">
+                    <a:lnL w="12700" cap="flat" cmpd="sng" algn="ctr">
+                      <a:solidFill>
+                        <a:schemeClr val="tx1"/>
+                      </a:solidFill>
+                      <a:prstDash val="solid"/>
+                      <a:round/>
+                      <a:headEnd type="none" w="med" len="med"/>
+                      <a:tailEnd type="none" w="med" len="med"/>
+                    </a:lnL>
+                    <a:lnR w="12700" cap="flat" cmpd="sng" algn="ctr">
+                      <a:solidFill>
+                        <a:schemeClr val="tx1"/>
+                      </a:solidFill>
+                      <a:prstDash val="solid"/>
+                      <a:round/>
+                      <a:headEnd type="none" w="med" len="med"/>
+                      <a:tailEnd type="none" w="med" len="med"/>
+                    </a:lnR>
+                    <a:lnT w="12700" cap="flat" cmpd="sng" algn="ctr">
+                      <a:solidFill>
+                        <a:schemeClr val="tx1"/>
+                      </a:solidFill>
+                      <a:prstDash val="solid"/>
+                      <a:round/>
+                      <a:headEnd type="none" w="med" len="med"/>
+                      <a:tailEnd type="none" w="med" len="med"/>
+                    </a:lnT>
+                    <a:lnB w="12700" cap="flat" cmpd="sng" algn="ctr">
+                      <a:solidFill>
+                        <a:schemeClr val="tx1"/>
+                      </a:solidFill>
+                      <a:prstDash val="solid"/>
+                      <a:round/>
+                      <a:headEnd type="none" w="med" len="med"/>
+                      <a:tailEnd type="none" w="med" len="med"/>
+                    </a:lnB>
+                    <a:noFill/>
+                  </a:tcPr>
                 </a:tc>
                 <a:extLst>
                   <a:ext uri="{0D108BD9-81ED-4DB2-BD59-A6C34878D82A}">
@@ -6138,18 +7101,62 @@
                       </a:pPr>
                       <a:r>
                         <a:rPr lang="en-US" sz="1100" dirty="0">
+                          <a:solidFill>
+                            <a:schemeClr val="tx1"/>
+                          </a:solidFill>
                           <a:effectLst/>
                         </a:rPr>
                         <a:t>1</a:t>
                       </a:r>
                       <a:endParaRPr lang="ru-RU" sz="1100" dirty="0">
+                        <a:solidFill>
+                          <a:schemeClr val="tx1"/>
+                        </a:solidFill>
                         <a:effectLst/>
                         <a:latin typeface="Times New Roman" panose="02020603050405020304" pitchFamily="18" charset="0"/>
                         <a:ea typeface="Times New Roman" panose="02020603050405020304" pitchFamily="18" charset="0"/>
                       </a:endParaRPr>
                     </a:p>
                   </a:txBody>
-                  <a:tcPr marL="27428" marR="27428" marT="0" marB="0"/>
+                  <a:tcPr marL="27428" marR="27428" marT="0" marB="0">
+                    <a:lnL w="12700" cap="flat" cmpd="sng" algn="ctr">
+                      <a:solidFill>
+                        <a:schemeClr val="tx1"/>
+                      </a:solidFill>
+                      <a:prstDash val="solid"/>
+                      <a:round/>
+                      <a:headEnd type="none" w="med" len="med"/>
+                      <a:tailEnd type="none" w="med" len="med"/>
+                    </a:lnL>
+                    <a:lnR w="12700" cap="flat" cmpd="sng" algn="ctr">
+                      <a:solidFill>
+                        <a:schemeClr val="tx1"/>
+                      </a:solidFill>
+                      <a:prstDash val="solid"/>
+                      <a:round/>
+                      <a:headEnd type="none" w="med" len="med"/>
+                      <a:tailEnd type="none" w="med" len="med"/>
+                    </a:lnR>
+                    <a:lnT w="12700" cap="flat" cmpd="sng" algn="ctr">
+                      <a:solidFill>
+                        <a:schemeClr val="tx1"/>
+                      </a:solidFill>
+                      <a:prstDash val="solid"/>
+                      <a:round/>
+                      <a:headEnd type="none" w="med" len="med"/>
+                      <a:tailEnd type="none" w="med" len="med"/>
+                    </a:lnT>
+                    <a:lnB w="12700" cap="flat" cmpd="sng" algn="ctr">
+                      <a:solidFill>
+                        <a:schemeClr val="tx1"/>
+                      </a:solidFill>
+                      <a:prstDash val="solid"/>
+                      <a:round/>
+                      <a:headEnd type="none" w="med" len="med"/>
+                      <a:tailEnd type="none" w="med" len="med"/>
+                    </a:lnB>
+                    <a:noFill/>
+                  </a:tcPr>
                 </a:tc>
                 <a:tc gridSpan="2">
                   <a:txBody>
@@ -6158,14 +7165,59 @@
                     <a:p>
                       <a:r>
                         <a:rPr lang="en-US" sz="1100" dirty="0">
+                          <a:solidFill>
+                            <a:schemeClr val="tx1"/>
+                          </a:solidFill>
                           <a:effectLst/>
                         </a:rPr>
                         <a:t>id</a:t>
                       </a:r>
-                      <a:endParaRPr lang="ru-RU" sz="4400" dirty="0"/>
+                      <a:endParaRPr lang="ru-RU" sz="4400" dirty="0">
+                        <a:solidFill>
+                          <a:schemeClr val="tx1"/>
+                        </a:solidFill>
+                      </a:endParaRPr>
                     </a:p>
                   </a:txBody>
-                  <a:tcPr marL="27428" marR="27428" marT="0" marB="0"/>
+                  <a:tcPr marL="27428" marR="27428" marT="0" marB="0">
+                    <a:lnL w="12700" cap="flat" cmpd="sng" algn="ctr">
+                      <a:solidFill>
+                        <a:schemeClr val="tx1"/>
+                      </a:solidFill>
+                      <a:prstDash val="solid"/>
+                      <a:round/>
+                      <a:headEnd type="none" w="med" len="med"/>
+                      <a:tailEnd type="none" w="med" len="med"/>
+                    </a:lnL>
+                    <a:lnR w="12700" cap="flat" cmpd="sng" algn="ctr">
+                      <a:solidFill>
+                        <a:schemeClr val="tx1"/>
+                      </a:solidFill>
+                      <a:prstDash val="solid"/>
+                      <a:round/>
+                      <a:headEnd type="none" w="med" len="med"/>
+                      <a:tailEnd type="none" w="med" len="med"/>
+                    </a:lnR>
+                    <a:lnT w="12700" cap="flat" cmpd="sng" algn="ctr">
+                      <a:solidFill>
+                        <a:schemeClr val="tx1"/>
+                      </a:solidFill>
+                      <a:prstDash val="solid"/>
+                      <a:round/>
+                      <a:headEnd type="none" w="med" len="med"/>
+                      <a:tailEnd type="none" w="med" len="med"/>
+                    </a:lnT>
+                    <a:lnB w="12700" cap="flat" cmpd="sng" algn="ctr">
+                      <a:solidFill>
+                        <a:schemeClr val="tx1"/>
+                      </a:solidFill>
+                      <a:prstDash val="solid"/>
+                      <a:round/>
+                      <a:headEnd type="none" w="med" len="med"/>
+                      <a:tailEnd type="none" w="med" len="med"/>
+                    </a:lnB>
+                    <a:noFill/>
+                  </a:tcPr>
                 </a:tc>
                 <a:tc hMerge="1">
                   <a:txBody>
@@ -6184,14 +7236,59 @@
                     <a:p>
                       <a:r>
                         <a:rPr lang="en-US" sz="1100" dirty="0">
+                          <a:solidFill>
+                            <a:schemeClr val="tx1"/>
+                          </a:solidFill>
                           <a:effectLst/>
                         </a:rPr>
                         <a:t>1..1</a:t>
                       </a:r>
-                      <a:endParaRPr lang="ru-RU" dirty="0"/>
+                      <a:endParaRPr lang="ru-RU" dirty="0">
+                        <a:solidFill>
+                          <a:schemeClr val="tx1"/>
+                        </a:solidFill>
+                      </a:endParaRPr>
                     </a:p>
                   </a:txBody>
-                  <a:tcPr marL="27428" marR="27428" marT="0" marB="0"/>
+                  <a:tcPr marL="27428" marR="27428" marT="0" marB="0">
+                    <a:lnL w="12700" cap="flat" cmpd="sng" algn="ctr">
+                      <a:solidFill>
+                        <a:schemeClr val="tx1"/>
+                      </a:solidFill>
+                      <a:prstDash val="solid"/>
+                      <a:round/>
+                      <a:headEnd type="none" w="med" len="med"/>
+                      <a:tailEnd type="none" w="med" len="med"/>
+                    </a:lnL>
+                    <a:lnR w="12700" cap="flat" cmpd="sng" algn="ctr">
+                      <a:solidFill>
+                        <a:schemeClr val="tx1"/>
+                      </a:solidFill>
+                      <a:prstDash val="solid"/>
+                      <a:round/>
+                      <a:headEnd type="none" w="med" len="med"/>
+                      <a:tailEnd type="none" w="med" len="med"/>
+                    </a:lnR>
+                    <a:lnT w="12700" cap="flat" cmpd="sng" algn="ctr">
+                      <a:solidFill>
+                        <a:schemeClr val="tx1"/>
+                      </a:solidFill>
+                      <a:prstDash val="solid"/>
+                      <a:round/>
+                      <a:headEnd type="none" w="med" len="med"/>
+                      <a:tailEnd type="none" w="med" len="med"/>
+                    </a:lnT>
+                    <a:lnB w="12700" cap="flat" cmpd="sng" algn="ctr">
+                      <a:solidFill>
+                        <a:schemeClr val="tx1"/>
+                      </a:solidFill>
+                      <a:prstDash val="solid"/>
+                      <a:round/>
+                      <a:headEnd type="none" w="med" len="med"/>
+                      <a:tailEnd type="none" w="med" len="med"/>
+                    </a:lnB>
+                    <a:noFill/>
+                  </a:tcPr>
                 </a:tc>
                 <a:tc gridSpan="2">
                   <a:txBody>
@@ -6200,32 +7297,86 @@
                     <a:p>
                       <a:r>
                         <a:rPr lang="en-US" sz="1100" dirty="0" err="1">
+                          <a:solidFill>
+                            <a:schemeClr val="tx1"/>
+                          </a:solidFill>
                           <a:effectLst/>
                         </a:rPr>
                         <a:t>Идентификатор</a:t>
                       </a:r>
                       <a:r>
                         <a:rPr lang="en-US" sz="1100" dirty="0">
+                          <a:solidFill>
+                            <a:schemeClr val="tx1"/>
+                          </a:solidFill>
                           <a:effectLst/>
                         </a:rPr>
                         <a:t> </a:t>
                       </a:r>
                       <a:r>
                         <a:rPr lang="en-US" sz="1100" dirty="0" err="1">
+                          <a:solidFill>
+                            <a:schemeClr val="tx1"/>
+                          </a:solidFill>
                           <a:effectLst/>
                         </a:rPr>
                         <a:t>категории</a:t>
                       </a:r>
                       <a:r>
                         <a:rPr lang="en-US" sz="1100" dirty="0">
+                          <a:solidFill>
+                            <a:schemeClr val="tx1"/>
+                          </a:solidFill>
                           <a:effectLst/>
                         </a:rPr>
                         <a:t> </a:t>
                       </a:r>
-                      <a:endParaRPr lang="ru-RU" dirty="0"/>
+                      <a:endParaRPr lang="ru-RU" dirty="0">
+                        <a:solidFill>
+                          <a:schemeClr val="tx1"/>
+                        </a:solidFill>
+                      </a:endParaRPr>
                     </a:p>
                   </a:txBody>
-                  <a:tcPr marL="27428" marR="27428" marT="0" marB="0"/>
+                  <a:tcPr marL="27428" marR="27428" marT="0" marB="0">
+                    <a:lnL w="12700" cap="flat" cmpd="sng" algn="ctr">
+                      <a:solidFill>
+                        <a:schemeClr val="tx1"/>
+                      </a:solidFill>
+                      <a:prstDash val="solid"/>
+                      <a:round/>
+                      <a:headEnd type="none" w="med" len="med"/>
+                      <a:tailEnd type="none" w="med" len="med"/>
+                    </a:lnL>
+                    <a:lnR w="12700" cap="flat" cmpd="sng" algn="ctr">
+                      <a:solidFill>
+                        <a:schemeClr val="tx1"/>
+                      </a:solidFill>
+                      <a:prstDash val="solid"/>
+                      <a:round/>
+                      <a:headEnd type="none" w="med" len="med"/>
+                      <a:tailEnd type="none" w="med" len="med"/>
+                    </a:lnR>
+                    <a:lnT w="12700" cap="flat" cmpd="sng" algn="ctr">
+                      <a:solidFill>
+                        <a:schemeClr val="tx1"/>
+                      </a:solidFill>
+                      <a:prstDash val="solid"/>
+                      <a:round/>
+                      <a:headEnd type="none" w="med" len="med"/>
+                      <a:tailEnd type="none" w="med" len="med"/>
+                    </a:lnT>
+                    <a:lnB w="12700" cap="flat" cmpd="sng" algn="ctr">
+                      <a:solidFill>
+                        <a:schemeClr val="tx1"/>
+                      </a:solidFill>
+                      <a:prstDash val="solid"/>
+                      <a:round/>
+                      <a:headEnd type="none" w="med" len="med"/>
+                      <a:tailEnd type="none" w="med" len="med"/>
+                    </a:lnB>
+                    <a:noFill/>
+                  </a:tcPr>
                 </a:tc>
                 <a:tc hMerge="1">
                   <a:txBody>
@@ -6249,18 +7400,62 @@
                       </a:pPr>
                       <a:r>
                         <a:rPr lang="en-US" sz="1100" dirty="0">
+                          <a:solidFill>
+                            <a:schemeClr val="tx1"/>
+                          </a:solidFill>
                           <a:effectLst/>
                         </a:rPr>
                         <a:t>3</a:t>
                       </a:r>
                       <a:endParaRPr lang="ru-RU" sz="1100" dirty="0">
+                        <a:solidFill>
+                          <a:schemeClr val="tx1"/>
+                        </a:solidFill>
                         <a:effectLst/>
                         <a:latin typeface="Times New Roman" panose="02020603050405020304" pitchFamily="18" charset="0"/>
                         <a:ea typeface="Times New Roman" panose="02020603050405020304" pitchFamily="18" charset="0"/>
                       </a:endParaRPr>
                     </a:p>
                   </a:txBody>
-                  <a:tcPr marL="27428" marR="27428" marT="0" marB="0"/>
+                  <a:tcPr marL="27428" marR="27428" marT="0" marB="0">
+                    <a:lnL w="12700" cap="flat" cmpd="sng" algn="ctr">
+                      <a:solidFill>
+                        <a:schemeClr val="tx1"/>
+                      </a:solidFill>
+                      <a:prstDash val="solid"/>
+                      <a:round/>
+                      <a:headEnd type="none" w="med" len="med"/>
+                      <a:tailEnd type="none" w="med" len="med"/>
+                    </a:lnL>
+                    <a:lnR w="12700" cap="flat" cmpd="sng" algn="ctr">
+                      <a:solidFill>
+                        <a:schemeClr val="tx1"/>
+                      </a:solidFill>
+                      <a:prstDash val="solid"/>
+                      <a:round/>
+                      <a:headEnd type="none" w="med" len="med"/>
+                      <a:tailEnd type="none" w="med" len="med"/>
+                    </a:lnR>
+                    <a:lnT w="12700" cap="flat" cmpd="sng" algn="ctr">
+                      <a:solidFill>
+                        <a:schemeClr val="tx1"/>
+                      </a:solidFill>
+                      <a:prstDash val="solid"/>
+                      <a:round/>
+                      <a:headEnd type="none" w="med" len="med"/>
+                      <a:tailEnd type="none" w="med" len="med"/>
+                    </a:lnT>
+                    <a:lnB w="12700" cap="flat" cmpd="sng" algn="ctr">
+                      <a:solidFill>
+                        <a:schemeClr val="tx1"/>
+                      </a:solidFill>
+                      <a:prstDash val="solid"/>
+                      <a:round/>
+                      <a:headEnd type="none" w="med" len="med"/>
+                      <a:tailEnd type="none" w="med" len="med"/>
+                    </a:lnB>
+                    <a:noFill/>
+                  </a:tcPr>
                 </a:tc>
                 <a:extLst>
                   <a:ext uri="{0D108BD9-81ED-4DB2-BD59-A6C34878D82A}">
@@ -6281,18 +7476,62 @@
                       </a:pPr>
                       <a:r>
                         <a:rPr lang="en-US" sz="1100">
+                          <a:solidFill>
+                            <a:schemeClr val="tx1"/>
+                          </a:solidFill>
                           <a:effectLst/>
                         </a:rPr>
                         <a:t>ТЕЛО ЗАПРОСА</a:t>
                       </a:r>
                       <a:endParaRPr lang="ru-RU" sz="1100">
+                        <a:solidFill>
+                          <a:schemeClr val="tx1"/>
+                        </a:solidFill>
                         <a:effectLst/>
                         <a:latin typeface="Times New Roman" panose="02020603050405020304" pitchFamily="18" charset="0"/>
                         <a:ea typeface="Times New Roman" panose="02020603050405020304" pitchFamily="18" charset="0"/>
                       </a:endParaRPr>
                     </a:p>
                   </a:txBody>
-                  <a:tcPr marL="27428" marR="27428" marT="0" marB="0"/>
+                  <a:tcPr marL="27428" marR="27428" marT="0" marB="0">
+                    <a:lnL w="12700" cap="flat" cmpd="sng" algn="ctr">
+                      <a:solidFill>
+                        <a:schemeClr val="tx1"/>
+                      </a:solidFill>
+                      <a:prstDash val="solid"/>
+                      <a:round/>
+                      <a:headEnd type="none" w="med" len="med"/>
+                      <a:tailEnd type="none" w="med" len="med"/>
+                    </a:lnL>
+                    <a:lnR w="12700" cap="flat" cmpd="sng" algn="ctr">
+                      <a:solidFill>
+                        <a:schemeClr val="tx1"/>
+                      </a:solidFill>
+                      <a:prstDash val="solid"/>
+                      <a:round/>
+                      <a:headEnd type="none" w="med" len="med"/>
+                      <a:tailEnd type="none" w="med" len="med"/>
+                    </a:lnR>
+                    <a:lnT w="12700" cap="flat" cmpd="sng" algn="ctr">
+                      <a:solidFill>
+                        <a:schemeClr val="tx1"/>
+                      </a:solidFill>
+                      <a:prstDash val="solid"/>
+                      <a:round/>
+                      <a:headEnd type="none" w="med" len="med"/>
+                      <a:tailEnd type="none" w="med" len="med"/>
+                    </a:lnT>
+                    <a:lnB w="12700" cap="flat" cmpd="sng" algn="ctr">
+                      <a:solidFill>
+                        <a:schemeClr val="tx1"/>
+                      </a:solidFill>
+                      <a:prstDash val="solid"/>
+                      <a:round/>
+                      <a:headEnd type="none" w="med" len="med"/>
+                      <a:tailEnd type="none" w="med" len="med"/>
+                    </a:lnB>
+                    <a:noFill/>
+                  </a:tcPr>
                 </a:tc>
                 <a:tc hMerge="1">
                   <a:txBody>
@@ -6382,18 +7621,62 @@
                       </a:pPr>
                       <a:r>
                         <a:rPr lang="en-US" sz="1100" dirty="0">
+                          <a:solidFill>
+                            <a:schemeClr val="tx1"/>
+                          </a:solidFill>
                           <a:effectLst/>
                         </a:rPr>
                         <a:t>—</a:t>
                       </a:r>
                       <a:endParaRPr lang="ru-RU" sz="1100" dirty="0">
+                        <a:solidFill>
+                          <a:schemeClr val="tx1"/>
+                        </a:solidFill>
                         <a:effectLst/>
                         <a:latin typeface="Times New Roman" panose="02020603050405020304" pitchFamily="18" charset="0"/>
                         <a:ea typeface="Times New Roman" panose="02020603050405020304" pitchFamily="18" charset="0"/>
                       </a:endParaRPr>
                     </a:p>
                   </a:txBody>
-                  <a:tcPr marL="27428" marR="27428" marT="0" marB="0"/>
+                  <a:tcPr marL="27428" marR="27428" marT="0" marB="0">
+                    <a:lnL w="12700" cap="flat" cmpd="sng" algn="ctr">
+                      <a:solidFill>
+                        <a:schemeClr val="tx1"/>
+                      </a:solidFill>
+                      <a:prstDash val="solid"/>
+                      <a:round/>
+                      <a:headEnd type="none" w="med" len="med"/>
+                      <a:tailEnd type="none" w="med" len="med"/>
+                    </a:lnL>
+                    <a:lnR w="12700" cap="flat" cmpd="sng" algn="ctr">
+                      <a:solidFill>
+                        <a:schemeClr val="tx1"/>
+                      </a:solidFill>
+                      <a:prstDash val="solid"/>
+                      <a:round/>
+                      <a:headEnd type="none" w="med" len="med"/>
+                      <a:tailEnd type="none" w="med" len="med"/>
+                    </a:lnR>
+                    <a:lnT w="12700" cap="flat" cmpd="sng" algn="ctr">
+                      <a:solidFill>
+                        <a:schemeClr val="tx1"/>
+                      </a:solidFill>
+                      <a:prstDash val="solid"/>
+                      <a:round/>
+                      <a:headEnd type="none" w="med" len="med"/>
+                      <a:tailEnd type="none" w="med" len="med"/>
+                    </a:lnT>
+                    <a:lnB w="12700" cap="flat" cmpd="sng" algn="ctr">
+                      <a:solidFill>
+                        <a:schemeClr val="tx1"/>
+                      </a:solidFill>
+                      <a:prstDash val="solid"/>
+                      <a:round/>
+                      <a:headEnd type="none" w="med" len="med"/>
+                      <a:tailEnd type="none" w="med" len="med"/>
+                    </a:lnB>
+                    <a:noFill/>
+                  </a:tcPr>
                 </a:tc>
                 <a:tc hMerge="1">
                   <a:txBody>
@@ -6483,18 +7766,62 @@
                       </a:pPr>
                       <a:r>
                         <a:rPr lang="en-US" sz="1100" dirty="0">
+                          <a:solidFill>
+                            <a:schemeClr val="tx1"/>
+                          </a:solidFill>
                           <a:effectLst/>
                         </a:rPr>
                         <a:t>ОПИСАНИЕ ОТВЕТА</a:t>
                       </a:r>
                       <a:endParaRPr lang="ru-RU" sz="1100" dirty="0">
+                        <a:solidFill>
+                          <a:schemeClr val="tx1"/>
+                        </a:solidFill>
                         <a:effectLst/>
                         <a:latin typeface="Times New Roman" panose="02020603050405020304" pitchFamily="18" charset="0"/>
                         <a:ea typeface="Times New Roman" panose="02020603050405020304" pitchFamily="18" charset="0"/>
                       </a:endParaRPr>
                     </a:p>
                   </a:txBody>
-                  <a:tcPr marL="27428" marR="27428" marT="0" marB="0"/>
+                  <a:tcPr marL="27428" marR="27428" marT="0" marB="0">
+                    <a:lnL w="12700" cap="flat" cmpd="sng" algn="ctr">
+                      <a:solidFill>
+                        <a:schemeClr val="tx1"/>
+                      </a:solidFill>
+                      <a:prstDash val="solid"/>
+                      <a:round/>
+                      <a:headEnd type="none" w="med" len="med"/>
+                      <a:tailEnd type="none" w="med" len="med"/>
+                    </a:lnL>
+                    <a:lnR w="12700" cap="flat" cmpd="sng" algn="ctr">
+                      <a:solidFill>
+                        <a:schemeClr val="tx1"/>
+                      </a:solidFill>
+                      <a:prstDash val="solid"/>
+                      <a:round/>
+                      <a:headEnd type="none" w="med" len="med"/>
+                      <a:tailEnd type="none" w="med" len="med"/>
+                    </a:lnR>
+                    <a:lnT w="12700" cap="flat" cmpd="sng" algn="ctr">
+                      <a:solidFill>
+                        <a:schemeClr val="tx1"/>
+                      </a:solidFill>
+                      <a:prstDash val="solid"/>
+                      <a:round/>
+                      <a:headEnd type="none" w="med" len="med"/>
+                      <a:tailEnd type="none" w="med" len="med"/>
+                    </a:lnT>
+                    <a:lnB w="12700" cap="flat" cmpd="sng" algn="ctr">
+                      <a:solidFill>
+                        <a:schemeClr val="tx1"/>
+                      </a:solidFill>
+                      <a:prstDash val="solid"/>
+                      <a:round/>
+                      <a:headEnd type="none" w="med" len="med"/>
+                      <a:tailEnd type="none" w="med" len="med"/>
+                    </a:lnB>
+                    <a:noFill/>
+                  </a:tcPr>
                 </a:tc>
                 <a:tc hMerge="1">
                   <a:txBody>
@@ -6584,18 +7911,62 @@
                       </a:pPr>
                       <a:r>
                         <a:rPr lang="en-US" sz="1100">
+                          <a:solidFill>
+                            <a:schemeClr val="tx1"/>
+                          </a:solidFill>
                           <a:effectLst/>
                         </a:rPr>
                         <a:t>№</a:t>
                       </a:r>
                       <a:endParaRPr lang="ru-RU" sz="1100">
+                        <a:solidFill>
+                          <a:schemeClr val="tx1"/>
+                        </a:solidFill>
                         <a:effectLst/>
                         <a:latin typeface="Times New Roman" panose="02020603050405020304" pitchFamily="18" charset="0"/>
                         <a:ea typeface="Times New Roman" panose="02020603050405020304" pitchFamily="18" charset="0"/>
                       </a:endParaRPr>
                     </a:p>
                   </a:txBody>
-                  <a:tcPr marL="27428" marR="27428" marT="0" marB="0"/>
+                  <a:tcPr marL="27428" marR="27428" marT="0" marB="0">
+                    <a:lnL w="12700" cap="flat" cmpd="sng" algn="ctr">
+                      <a:solidFill>
+                        <a:schemeClr val="tx1"/>
+                      </a:solidFill>
+                      <a:prstDash val="solid"/>
+                      <a:round/>
+                      <a:headEnd type="none" w="med" len="med"/>
+                      <a:tailEnd type="none" w="med" len="med"/>
+                    </a:lnL>
+                    <a:lnR w="12700" cap="flat" cmpd="sng" algn="ctr">
+                      <a:solidFill>
+                        <a:schemeClr val="tx1"/>
+                      </a:solidFill>
+                      <a:prstDash val="solid"/>
+                      <a:round/>
+                      <a:headEnd type="none" w="med" len="med"/>
+                      <a:tailEnd type="none" w="med" len="med"/>
+                    </a:lnR>
+                    <a:lnT w="12700" cap="flat" cmpd="sng" algn="ctr">
+                      <a:solidFill>
+                        <a:schemeClr val="tx1"/>
+                      </a:solidFill>
+                      <a:prstDash val="solid"/>
+                      <a:round/>
+                      <a:headEnd type="none" w="med" len="med"/>
+                      <a:tailEnd type="none" w="med" len="med"/>
+                    </a:lnT>
+                    <a:lnB w="12700" cap="flat" cmpd="sng" algn="ctr">
+                      <a:solidFill>
+                        <a:schemeClr val="tx1"/>
+                      </a:solidFill>
+                      <a:prstDash val="solid"/>
+                      <a:round/>
+                      <a:headEnd type="none" w="med" len="med"/>
+                      <a:tailEnd type="none" w="med" len="med"/>
+                    </a:lnB>
+                    <a:noFill/>
+                  </a:tcPr>
                 </a:tc>
                 <a:tc gridSpan="2">
                   <a:txBody>
@@ -6604,14 +7975,59 @@
                     <a:p>
                       <a:r>
                         <a:rPr lang="en-US" sz="1100">
+                          <a:solidFill>
+                            <a:schemeClr val="tx1"/>
+                          </a:solidFill>
                           <a:effectLst/>
                         </a:rPr>
                         <a:t>Метка атрибута</a:t>
                       </a:r>
-                      <a:endParaRPr lang="ru-RU"/>
+                      <a:endParaRPr lang="ru-RU">
+                        <a:solidFill>
+                          <a:schemeClr val="tx1"/>
+                        </a:solidFill>
+                      </a:endParaRPr>
                     </a:p>
                   </a:txBody>
-                  <a:tcPr marL="27428" marR="27428" marT="0" marB="0"/>
+                  <a:tcPr marL="27428" marR="27428" marT="0" marB="0">
+                    <a:lnL w="12700" cap="flat" cmpd="sng" algn="ctr">
+                      <a:solidFill>
+                        <a:schemeClr val="tx1"/>
+                      </a:solidFill>
+                      <a:prstDash val="solid"/>
+                      <a:round/>
+                      <a:headEnd type="none" w="med" len="med"/>
+                      <a:tailEnd type="none" w="med" len="med"/>
+                    </a:lnL>
+                    <a:lnR w="12700" cap="flat" cmpd="sng" algn="ctr">
+                      <a:solidFill>
+                        <a:schemeClr val="tx1"/>
+                      </a:solidFill>
+                      <a:prstDash val="solid"/>
+                      <a:round/>
+                      <a:headEnd type="none" w="med" len="med"/>
+                      <a:tailEnd type="none" w="med" len="med"/>
+                    </a:lnR>
+                    <a:lnT w="12700" cap="flat" cmpd="sng" algn="ctr">
+                      <a:solidFill>
+                        <a:schemeClr val="tx1"/>
+                      </a:solidFill>
+                      <a:prstDash val="solid"/>
+                      <a:round/>
+                      <a:headEnd type="none" w="med" len="med"/>
+                      <a:tailEnd type="none" w="med" len="med"/>
+                    </a:lnT>
+                    <a:lnB w="12700" cap="flat" cmpd="sng" algn="ctr">
+                      <a:solidFill>
+                        <a:schemeClr val="tx1"/>
+                      </a:solidFill>
+                      <a:prstDash val="solid"/>
+                      <a:round/>
+                      <a:headEnd type="none" w="med" len="med"/>
+                      <a:tailEnd type="none" w="med" len="med"/>
+                    </a:lnB>
+                    <a:noFill/>
+                  </a:tcPr>
                 </a:tc>
                 <a:tc hMerge="1">
                   <a:txBody>
@@ -6635,24 +8051,71 @@
                       </a:pPr>
                       <a:r>
                         <a:rPr lang="en-US" sz="1100" dirty="0" err="1">
+                          <a:solidFill>
+                            <a:schemeClr val="tx1"/>
+                          </a:solidFill>
                           <a:effectLst/>
                         </a:rPr>
                         <a:t>Обязат</a:t>
                       </a:r>
                       <a:r>
                         <a:rPr lang="en-US" sz="1100" dirty="0">
+                          <a:solidFill>
+                            <a:schemeClr val="tx1"/>
+                          </a:solidFill>
                           <a:effectLst/>
                         </a:rPr>
                         <a:t>.</a:t>
                       </a:r>
                       <a:endParaRPr lang="ru-RU" sz="1100" dirty="0">
+                        <a:solidFill>
+                          <a:schemeClr val="tx1"/>
+                        </a:solidFill>
                         <a:effectLst/>
                         <a:latin typeface="Times New Roman" panose="02020603050405020304" pitchFamily="18" charset="0"/>
                         <a:ea typeface="Times New Roman" panose="02020603050405020304" pitchFamily="18" charset="0"/>
                       </a:endParaRPr>
                     </a:p>
                   </a:txBody>
-                  <a:tcPr marL="27428" marR="27428" marT="0" marB="0"/>
+                  <a:tcPr marL="27428" marR="27428" marT="0" marB="0">
+                    <a:lnL w="12700" cap="flat" cmpd="sng" algn="ctr">
+                      <a:solidFill>
+                        <a:schemeClr val="tx1"/>
+                      </a:solidFill>
+                      <a:prstDash val="solid"/>
+                      <a:round/>
+                      <a:headEnd type="none" w="med" len="med"/>
+                      <a:tailEnd type="none" w="med" len="med"/>
+                    </a:lnL>
+                    <a:lnR w="12700" cap="flat" cmpd="sng" algn="ctr">
+                      <a:solidFill>
+                        <a:schemeClr val="tx1"/>
+                      </a:solidFill>
+                      <a:prstDash val="solid"/>
+                      <a:round/>
+                      <a:headEnd type="none" w="med" len="med"/>
+                      <a:tailEnd type="none" w="med" len="med"/>
+                    </a:lnR>
+                    <a:lnT w="12700" cap="flat" cmpd="sng" algn="ctr">
+                      <a:solidFill>
+                        <a:schemeClr val="tx1"/>
+                      </a:solidFill>
+                      <a:prstDash val="solid"/>
+                      <a:round/>
+                      <a:headEnd type="none" w="med" len="med"/>
+                      <a:tailEnd type="none" w="med" len="med"/>
+                    </a:lnT>
+                    <a:lnB w="12700" cap="flat" cmpd="sng" algn="ctr">
+                      <a:solidFill>
+                        <a:schemeClr val="tx1"/>
+                      </a:solidFill>
+                      <a:prstDash val="solid"/>
+                      <a:round/>
+                      <a:headEnd type="none" w="med" len="med"/>
+                      <a:tailEnd type="none" w="med" len="med"/>
+                    </a:lnB>
+                    <a:noFill/>
+                  </a:tcPr>
                 </a:tc>
                 <a:tc gridSpan="2">
                   <a:txBody>
@@ -6661,14 +8124,59 @@
                     <a:p>
                       <a:r>
                         <a:rPr lang="en-US" sz="1100">
+                          <a:solidFill>
+                            <a:schemeClr val="tx1"/>
+                          </a:solidFill>
                           <a:effectLst/>
                         </a:rPr>
                         <a:t>Формат атрибута</a:t>
                       </a:r>
-                      <a:endParaRPr lang="ru-RU"/>
+                      <a:endParaRPr lang="ru-RU">
+                        <a:solidFill>
+                          <a:schemeClr val="tx1"/>
+                        </a:solidFill>
+                      </a:endParaRPr>
                     </a:p>
                   </a:txBody>
-                  <a:tcPr marL="27428" marR="27428" marT="0" marB="0"/>
+                  <a:tcPr marL="27428" marR="27428" marT="0" marB="0">
+                    <a:lnL w="12700" cap="flat" cmpd="sng" algn="ctr">
+                      <a:solidFill>
+                        <a:schemeClr val="tx1"/>
+                      </a:solidFill>
+                      <a:prstDash val="solid"/>
+                      <a:round/>
+                      <a:headEnd type="none" w="med" len="med"/>
+                      <a:tailEnd type="none" w="med" len="med"/>
+                    </a:lnL>
+                    <a:lnR w="12700" cap="flat" cmpd="sng" algn="ctr">
+                      <a:solidFill>
+                        <a:schemeClr val="tx1"/>
+                      </a:solidFill>
+                      <a:prstDash val="solid"/>
+                      <a:round/>
+                      <a:headEnd type="none" w="med" len="med"/>
+                      <a:tailEnd type="none" w="med" len="med"/>
+                    </a:lnR>
+                    <a:lnT w="12700" cap="flat" cmpd="sng" algn="ctr">
+                      <a:solidFill>
+                        <a:schemeClr val="tx1"/>
+                      </a:solidFill>
+                      <a:prstDash val="solid"/>
+                      <a:round/>
+                      <a:headEnd type="none" w="med" len="med"/>
+                      <a:tailEnd type="none" w="med" len="med"/>
+                    </a:lnT>
+                    <a:lnB w="12700" cap="flat" cmpd="sng" algn="ctr">
+                      <a:solidFill>
+                        <a:schemeClr val="tx1"/>
+                      </a:solidFill>
+                      <a:prstDash val="solid"/>
+                      <a:round/>
+                      <a:headEnd type="none" w="med" len="med"/>
+                      <a:tailEnd type="none" w="med" len="med"/>
+                    </a:lnB>
+                    <a:noFill/>
+                  </a:tcPr>
                 </a:tc>
                 <a:tc hMerge="1">
                   <a:txBody>
@@ -6692,18 +8200,62 @@
                       </a:pPr>
                       <a:r>
                         <a:rPr lang="en-US" sz="1100">
+                          <a:solidFill>
+                            <a:schemeClr val="tx1"/>
+                          </a:solidFill>
                           <a:effectLst/>
                         </a:rPr>
                         <a:t>Пример</a:t>
                       </a:r>
                       <a:endParaRPr lang="ru-RU" sz="1100">
+                        <a:solidFill>
+                          <a:schemeClr val="tx1"/>
+                        </a:solidFill>
                         <a:effectLst/>
                         <a:latin typeface="Times New Roman" panose="02020603050405020304" pitchFamily="18" charset="0"/>
                         <a:ea typeface="Times New Roman" panose="02020603050405020304" pitchFamily="18" charset="0"/>
                       </a:endParaRPr>
                     </a:p>
                   </a:txBody>
-                  <a:tcPr marL="27428" marR="27428" marT="0" marB="0"/>
+                  <a:tcPr marL="27428" marR="27428" marT="0" marB="0">
+                    <a:lnL w="12700" cap="flat" cmpd="sng" algn="ctr">
+                      <a:solidFill>
+                        <a:schemeClr val="tx1"/>
+                      </a:solidFill>
+                      <a:prstDash val="solid"/>
+                      <a:round/>
+                      <a:headEnd type="none" w="med" len="med"/>
+                      <a:tailEnd type="none" w="med" len="med"/>
+                    </a:lnL>
+                    <a:lnR w="12700" cap="flat" cmpd="sng" algn="ctr">
+                      <a:solidFill>
+                        <a:schemeClr val="tx1"/>
+                      </a:solidFill>
+                      <a:prstDash val="solid"/>
+                      <a:round/>
+                      <a:headEnd type="none" w="med" len="med"/>
+                      <a:tailEnd type="none" w="med" len="med"/>
+                    </a:lnR>
+                    <a:lnT w="12700" cap="flat" cmpd="sng" algn="ctr">
+                      <a:solidFill>
+                        <a:schemeClr val="tx1"/>
+                      </a:solidFill>
+                      <a:prstDash val="solid"/>
+                      <a:round/>
+                      <a:headEnd type="none" w="med" len="med"/>
+                      <a:tailEnd type="none" w="med" len="med"/>
+                    </a:lnT>
+                    <a:lnB w="12700" cap="flat" cmpd="sng" algn="ctr">
+                      <a:solidFill>
+                        <a:schemeClr val="tx1"/>
+                      </a:solidFill>
+                      <a:prstDash val="solid"/>
+                      <a:round/>
+                      <a:headEnd type="none" w="med" len="med"/>
+                      <a:tailEnd type="none" w="med" len="med"/>
+                    </a:lnB>
+                    <a:noFill/>
+                  </a:tcPr>
                 </a:tc>
                 <a:extLst>
                   <a:ext uri="{0D108BD9-81ED-4DB2-BD59-A6C34878D82A}">
@@ -6724,18 +8276,62 @@
                       </a:pPr>
                       <a:r>
                         <a:rPr lang="en-US" sz="1100">
+                          <a:solidFill>
+                            <a:schemeClr val="tx1"/>
+                          </a:solidFill>
                           <a:effectLst/>
                         </a:rPr>
                         <a:t>1</a:t>
                       </a:r>
                       <a:endParaRPr lang="ru-RU" sz="1100">
+                        <a:solidFill>
+                          <a:schemeClr val="tx1"/>
+                        </a:solidFill>
                         <a:effectLst/>
                         <a:latin typeface="Times New Roman" panose="02020603050405020304" pitchFamily="18" charset="0"/>
                         <a:ea typeface="Times New Roman" panose="02020603050405020304" pitchFamily="18" charset="0"/>
                       </a:endParaRPr>
                     </a:p>
                   </a:txBody>
-                  <a:tcPr marL="27428" marR="27428" marT="0" marB="0"/>
+                  <a:tcPr marL="27428" marR="27428" marT="0" marB="0">
+                    <a:lnL w="12700" cap="flat" cmpd="sng" algn="ctr">
+                      <a:solidFill>
+                        <a:schemeClr val="tx1"/>
+                      </a:solidFill>
+                      <a:prstDash val="solid"/>
+                      <a:round/>
+                      <a:headEnd type="none" w="med" len="med"/>
+                      <a:tailEnd type="none" w="med" len="med"/>
+                    </a:lnL>
+                    <a:lnR w="12700" cap="flat" cmpd="sng" algn="ctr">
+                      <a:solidFill>
+                        <a:schemeClr val="tx1"/>
+                      </a:solidFill>
+                      <a:prstDash val="solid"/>
+                      <a:round/>
+                      <a:headEnd type="none" w="med" len="med"/>
+                      <a:tailEnd type="none" w="med" len="med"/>
+                    </a:lnR>
+                    <a:lnT w="12700" cap="flat" cmpd="sng" algn="ctr">
+                      <a:solidFill>
+                        <a:schemeClr val="tx1"/>
+                      </a:solidFill>
+                      <a:prstDash val="solid"/>
+                      <a:round/>
+                      <a:headEnd type="none" w="med" len="med"/>
+                      <a:tailEnd type="none" w="med" len="med"/>
+                    </a:lnT>
+                    <a:lnB w="12700" cap="flat" cmpd="sng" algn="ctr">
+                      <a:solidFill>
+                        <a:schemeClr val="tx1"/>
+                      </a:solidFill>
+                      <a:prstDash val="solid"/>
+                      <a:round/>
+                      <a:headEnd type="none" w="med" len="med"/>
+                      <a:tailEnd type="none" w="med" len="med"/>
+                    </a:lnB>
+                    <a:noFill/>
+                  </a:tcPr>
                 </a:tc>
                 <a:tc gridSpan="2">
                   <a:txBody>
@@ -6744,14 +8340,59 @@
                     <a:p>
                       <a:r>
                         <a:rPr lang="en-US" sz="1100">
+                          <a:solidFill>
+                            <a:schemeClr val="tx1"/>
+                          </a:solidFill>
                           <a:effectLst/>
                         </a:rPr>
                         <a:t>success</a:t>
                       </a:r>
-                      <a:endParaRPr lang="ru-RU"/>
+                      <a:endParaRPr lang="ru-RU">
+                        <a:solidFill>
+                          <a:schemeClr val="tx1"/>
+                        </a:solidFill>
+                      </a:endParaRPr>
                     </a:p>
                   </a:txBody>
-                  <a:tcPr marL="27428" marR="27428" marT="0" marB="0"/>
+                  <a:tcPr marL="27428" marR="27428" marT="0" marB="0">
+                    <a:lnL w="12700" cap="flat" cmpd="sng" algn="ctr">
+                      <a:solidFill>
+                        <a:schemeClr val="tx1"/>
+                      </a:solidFill>
+                      <a:prstDash val="solid"/>
+                      <a:round/>
+                      <a:headEnd type="none" w="med" len="med"/>
+                      <a:tailEnd type="none" w="med" len="med"/>
+                    </a:lnL>
+                    <a:lnR w="12700" cap="flat" cmpd="sng" algn="ctr">
+                      <a:solidFill>
+                        <a:schemeClr val="tx1"/>
+                      </a:solidFill>
+                      <a:prstDash val="solid"/>
+                      <a:round/>
+                      <a:headEnd type="none" w="med" len="med"/>
+                      <a:tailEnd type="none" w="med" len="med"/>
+                    </a:lnR>
+                    <a:lnT w="12700" cap="flat" cmpd="sng" algn="ctr">
+                      <a:solidFill>
+                        <a:schemeClr val="tx1"/>
+                      </a:solidFill>
+                      <a:prstDash val="solid"/>
+                      <a:round/>
+                      <a:headEnd type="none" w="med" len="med"/>
+                      <a:tailEnd type="none" w="med" len="med"/>
+                    </a:lnT>
+                    <a:lnB w="12700" cap="flat" cmpd="sng" algn="ctr">
+                      <a:solidFill>
+                        <a:schemeClr val="tx1"/>
+                      </a:solidFill>
+                      <a:prstDash val="solid"/>
+                      <a:round/>
+                      <a:headEnd type="none" w="med" len="med"/>
+                      <a:tailEnd type="none" w="med" len="med"/>
+                    </a:lnB>
+                    <a:noFill/>
+                  </a:tcPr>
                 </a:tc>
                 <a:tc hMerge="1">
                   <a:txBody>
@@ -6775,18 +8416,62 @@
                       </a:pPr>
                       <a:r>
                         <a:rPr lang="en-US" sz="1100" dirty="0">
+                          <a:solidFill>
+                            <a:schemeClr val="tx1"/>
+                          </a:solidFill>
                           <a:effectLst/>
                         </a:rPr>
                         <a:t>1..1</a:t>
                       </a:r>
                       <a:endParaRPr lang="ru-RU" sz="1100" dirty="0">
+                        <a:solidFill>
+                          <a:schemeClr val="tx1"/>
+                        </a:solidFill>
                         <a:effectLst/>
                         <a:latin typeface="Times New Roman" panose="02020603050405020304" pitchFamily="18" charset="0"/>
                         <a:ea typeface="Times New Roman" panose="02020603050405020304" pitchFamily="18" charset="0"/>
                       </a:endParaRPr>
                     </a:p>
                   </a:txBody>
-                  <a:tcPr marL="27428" marR="27428" marT="0" marB="0"/>
+                  <a:tcPr marL="27428" marR="27428" marT="0" marB="0">
+                    <a:lnL w="12700" cap="flat" cmpd="sng" algn="ctr">
+                      <a:solidFill>
+                        <a:schemeClr val="tx1"/>
+                      </a:solidFill>
+                      <a:prstDash val="solid"/>
+                      <a:round/>
+                      <a:headEnd type="none" w="med" len="med"/>
+                      <a:tailEnd type="none" w="med" len="med"/>
+                    </a:lnL>
+                    <a:lnR w="12700" cap="flat" cmpd="sng" algn="ctr">
+                      <a:solidFill>
+                        <a:schemeClr val="tx1"/>
+                      </a:solidFill>
+                      <a:prstDash val="solid"/>
+                      <a:round/>
+                      <a:headEnd type="none" w="med" len="med"/>
+                      <a:tailEnd type="none" w="med" len="med"/>
+                    </a:lnR>
+                    <a:lnT w="12700" cap="flat" cmpd="sng" algn="ctr">
+                      <a:solidFill>
+                        <a:schemeClr val="tx1"/>
+                      </a:solidFill>
+                      <a:prstDash val="solid"/>
+                      <a:round/>
+                      <a:headEnd type="none" w="med" len="med"/>
+                      <a:tailEnd type="none" w="med" len="med"/>
+                    </a:lnT>
+                    <a:lnB w="12700" cap="flat" cmpd="sng" algn="ctr">
+                      <a:solidFill>
+                        <a:schemeClr val="tx1"/>
+                      </a:solidFill>
+                      <a:prstDash val="solid"/>
+                      <a:round/>
+                      <a:headEnd type="none" w="med" len="med"/>
+                      <a:tailEnd type="none" w="med" len="med"/>
+                    </a:lnB>
+                    <a:noFill/>
+                  </a:tcPr>
                 </a:tc>
                 <a:tc gridSpan="2">
                   <a:txBody>
@@ -6795,14 +8480,59 @@
                     <a:p>
                       <a:r>
                         <a:rPr lang="en-US" sz="1100">
+                          <a:solidFill>
+                            <a:schemeClr val="tx1"/>
+                          </a:solidFill>
                           <a:effectLst/>
                         </a:rPr>
                         <a:t>Флаг успешности операции</a:t>
                       </a:r>
-                      <a:endParaRPr lang="ru-RU"/>
+                      <a:endParaRPr lang="ru-RU">
+                        <a:solidFill>
+                          <a:schemeClr val="tx1"/>
+                        </a:solidFill>
+                      </a:endParaRPr>
                     </a:p>
                   </a:txBody>
-                  <a:tcPr marL="27428" marR="27428" marT="0" marB="0"/>
+                  <a:tcPr marL="27428" marR="27428" marT="0" marB="0">
+                    <a:lnL w="12700" cap="flat" cmpd="sng" algn="ctr">
+                      <a:solidFill>
+                        <a:schemeClr val="tx1"/>
+                      </a:solidFill>
+                      <a:prstDash val="solid"/>
+                      <a:round/>
+                      <a:headEnd type="none" w="med" len="med"/>
+                      <a:tailEnd type="none" w="med" len="med"/>
+                    </a:lnL>
+                    <a:lnR w="12700" cap="flat" cmpd="sng" algn="ctr">
+                      <a:solidFill>
+                        <a:schemeClr val="tx1"/>
+                      </a:solidFill>
+                      <a:prstDash val="solid"/>
+                      <a:round/>
+                      <a:headEnd type="none" w="med" len="med"/>
+                      <a:tailEnd type="none" w="med" len="med"/>
+                    </a:lnR>
+                    <a:lnT w="12700" cap="flat" cmpd="sng" algn="ctr">
+                      <a:solidFill>
+                        <a:schemeClr val="tx1"/>
+                      </a:solidFill>
+                      <a:prstDash val="solid"/>
+                      <a:round/>
+                      <a:headEnd type="none" w="med" len="med"/>
+                      <a:tailEnd type="none" w="med" len="med"/>
+                    </a:lnT>
+                    <a:lnB w="12700" cap="flat" cmpd="sng" algn="ctr">
+                      <a:solidFill>
+                        <a:schemeClr val="tx1"/>
+                      </a:solidFill>
+                      <a:prstDash val="solid"/>
+                      <a:round/>
+                      <a:headEnd type="none" w="med" len="med"/>
+                      <a:tailEnd type="none" w="med" len="med"/>
+                    </a:lnB>
+                    <a:noFill/>
+                  </a:tcPr>
                 </a:tc>
                 <a:tc hMerge="1">
                   <a:txBody>
@@ -6826,18 +8556,62 @@
                       </a:pPr>
                       <a:r>
                         <a:rPr lang="en-US" sz="1100">
+                          <a:solidFill>
+                            <a:schemeClr val="tx1"/>
+                          </a:solidFill>
                           <a:effectLst/>
                         </a:rPr>
                         <a:t>true</a:t>
                       </a:r>
                       <a:endParaRPr lang="ru-RU" sz="1100">
+                        <a:solidFill>
+                          <a:schemeClr val="tx1"/>
+                        </a:solidFill>
                         <a:effectLst/>
                         <a:latin typeface="Times New Roman" panose="02020603050405020304" pitchFamily="18" charset="0"/>
                         <a:ea typeface="Times New Roman" panose="02020603050405020304" pitchFamily="18" charset="0"/>
                       </a:endParaRPr>
                     </a:p>
                   </a:txBody>
-                  <a:tcPr marL="27428" marR="27428" marT="0" marB="0"/>
+                  <a:tcPr marL="27428" marR="27428" marT="0" marB="0">
+                    <a:lnL w="12700" cap="flat" cmpd="sng" algn="ctr">
+                      <a:solidFill>
+                        <a:schemeClr val="tx1"/>
+                      </a:solidFill>
+                      <a:prstDash val="solid"/>
+                      <a:round/>
+                      <a:headEnd type="none" w="med" len="med"/>
+                      <a:tailEnd type="none" w="med" len="med"/>
+                    </a:lnL>
+                    <a:lnR w="12700" cap="flat" cmpd="sng" algn="ctr">
+                      <a:solidFill>
+                        <a:schemeClr val="tx1"/>
+                      </a:solidFill>
+                      <a:prstDash val="solid"/>
+                      <a:round/>
+                      <a:headEnd type="none" w="med" len="med"/>
+                      <a:tailEnd type="none" w="med" len="med"/>
+                    </a:lnR>
+                    <a:lnT w="12700" cap="flat" cmpd="sng" algn="ctr">
+                      <a:solidFill>
+                        <a:schemeClr val="tx1"/>
+                      </a:solidFill>
+                      <a:prstDash val="solid"/>
+                      <a:round/>
+                      <a:headEnd type="none" w="med" len="med"/>
+                      <a:tailEnd type="none" w="med" len="med"/>
+                    </a:lnT>
+                    <a:lnB w="12700" cap="flat" cmpd="sng" algn="ctr">
+                      <a:solidFill>
+                        <a:schemeClr val="tx1"/>
+                      </a:solidFill>
+                      <a:prstDash val="solid"/>
+                      <a:round/>
+                      <a:headEnd type="none" w="med" len="med"/>
+                      <a:tailEnd type="none" w="med" len="med"/>
+                    </a:lnB>
+                    <a:noFill/>
+                  </a:tcPr>
                 </a:tc>
                 <a:extLst>
                   <a:ext uri="{0D108BD9-81ED-4DB2-BD59-A6C34878D82A}">
@@ -6858,18 +8632,62 @@
                       </a:pPr>
                       <a:r>
                         <a:rPr lang="en-US" sz="1100">
+                          <a:solidFill>
+                            <a:schemeClr val="tx1"/>
+                          </a:solidFill>
                           <a:effectLst/>
                         </a:rPr>
                         <a:t>2</a:t>
                       </a:r>
                       <a:endParaRPr lang="ru-RU" sz="1100">
+                        <a:solidFill>
+                          <a:schemeClr val="tx1"/>
+                        </a:solidFill>
                         <a:effectLst/>
                         <a:latin typeface="Times New Roman" panose="02020603050405020304" pitchFamily="18" charset="0"/>
                         <a:ea typeface="Times New Roman" panose="02020603050405020304" pitchFamily="18" charset="0"/>
                       </a:endParaRPr>
                     </a:p>
                   </a:txBody>
-                  <a:tcPr marL="27428" marR="27428" marT="0" marB="0"/>
+                  <a:tcPr marL="27428" marR="27428" marT="0" marB="0">
+                    <a:lnL w="12700" cap="flat" cmpd="sng" algn="ctr">
+                      <a:solidFill>
+                        <a:schemeClr val="tx1"/>
+                      </a:solidFill>
+                      <a:prstDash val="solid"/>
+                      <a:round/>
+                      <a:headEnd type="none" w="med" len="med"/>
+                      <a:tailEnd type="none" w="med" len="med"/>
+                    </a:lnL>
+                    <a:lnR w="12700" cap="flat" cmpd="sng" algn="ctr">
+                      <a:solidFill>
+                        <a:schemeClr val="tx1"/>
+                      </a:solidFill>
+                      <a:prstDash val="solid"/>
+                      <a:round/>
+                      <a:headEnd type="none" w="med" len="med"/>
+                      <a:tailEnd type="none" w="med" len="med"/>
+                    </a:lnR>
+                    <a:lnT w="12700" cap="flat" cmpd="sng" algn="ctr">
+                      <a:solidFill>
+                        <a:schemeClr val="tx1"/>
+                      </a:solidFill>
+                      <a:prstDash val="solid"/>
+                      <a:round/>
+                      <a:headEnd type="none" w="med" len="med"/>
+                      <a:tailEnd type="none" w="med" len="med"/>
+                    </a:lnT>
+                    <a:lnB w="12700" cap="flat" cmpd="sng" algn="ctr">
+                      <a:solidFill>
+                        <a:schemeClr val="tx1"/>
+                      </a:solidFill>
+                      <a:prstDash val="solid"/>
+                      <a:round/>
+                      <a:headEnd type="none" w="med" len="med"/>
+                      <a:tailEnd type="none" w="med" len="med"/>
+                    </a:lnB>
+                    <a:noFill/>
+                  </a:tcPr>
                 </a:tc>
                 <a:tc gridSpan="2">
                   <a:txBody>
@@ -6878,14 +8696,59 @@
                     <a:p>
                       <a:r>
                         <a:rPr lang="en-US" sz="1100">
+                          <a:solidFill>
+                            <a:schemeClr val="tx1"/>
+                          </a:solidFill>
                           <a:effectLst/>
                         </a:rPr>
                         <a:t>category</a:t>
                       </a:r>
-                      <a:endParaRPr lang="ru-RU"/>
+                      <a:endParaRPr lang="ru-RU">
+                        <a:solidFill>
+                          <a:schemeClr val="tx1"/>
+                        </a:solidFill>
+                      </a:endParaRPr>
                     </a:p>
                   </a:txBody>
-                  <a:tcPr marL="27428" marR="27428" marT="0" marB="0"/>
+                  <a:tcPr marL="27428" marR="27428" marT="0" marB="0">
+                    <a:lnL w="12700" cap="flat" cmpd="sng" algn="ctr">
+                      <a:solidFill>
+                        <a:schemeClr val="tx1"/>
+                      </a:solidFill>
+                      <a:prstDash val="solid"/>
+                      <a:round/>
+                      <a:headEnd type="none" w="med" len="med"/>
+                      <a:tailEnd type="none" w="med" len="med"/>
+                    </a:lnL>
+                    <a:lnR w="12700" cap="flat" cmpd="sng" algn="ctr">
+                      <a:solidFill>
+                        <a:schemeClr val="tx1"/>
+                      </a:solidFill>
+                      <a:prstDash val="solid"/>
+                      <a:round/>
+                      <a:headEnd type="none" w="med" len="med"/>
+                      <a:tailEnd type="none" w="med" len="med"/>
+                    </a:lnR>
+                    <a:lnT w="12700" cap="flat" cmpd="sng" algn="ctr">
+                      <a:solidFill>
+                        <a:schemeClr val="tx1"/>
+                      </a:solidFill>
+                      <a:prstDash val="solid"/>
+                      <a:round/>
+                      <a:headEnd type="none" w="med" len="med"/>
+                      <a:tailEnd type="none" w="med" len="med"/>
+                    </a:lnT>
+                    <a:lnB w="12700" cap="flat" cmpd="sng" algn="ctr">
+                      <a:solidFill>
+                        <a:schemeClr val="tx1"/>
+                      </a:solidFill>
+                      <a:prstDash val="solid"/>
+                      <a:round/>
+                      <a:headEnd type="none" w="med" len="med"/>
+                      <a:tailEnd type="none" w="med" len="med"/>
+                    </a:lnB>
+                    <a:noFill/>
+                  </a:tcPr>
                 </a:tc>
                 <a:tc hMerge="1">
                   <a:txBody>
@@ -6909,18 +8772,62 @@
                       </a:pPr>
                       <a:r>
                         <a:rPr lang="en-US" sz="1100">
+                          <a:solidFill>
+                            <a:schemeClr val="tx1"/>
+                          </a:solidFill>
                           <a:effectLst/>
                         </a:rPr>
                         <a:t>1..1</a:t>
                       </a:r>
                       <a:endParaRPr lang="ru-RU" sz="1100">
+                        <a:solidFill>
+                          <a:schemeClr val="tx1"/>
+                        </a:solidFill>
                         <a:effectLst/>
                         <a:latin typeface="Times New Roman" panose="02020603050405020304" pitchFamily="18" charset="0"/>
                         <a:ea typeface="Times New Roman" panose="02020603050405020304" pitchFamily="18" charset="0"/>
                       </a:endParaRPr>
                     </a:p>
                   </a:txBody>
-                  <a:tcPr marL="27428" marR="27428" marT="0" marB="0"/>
+                  <a:tcPr marL="27428" marR="27428" marT="0" marB="0">
+                    <a:lnL w="12700" cap="flat" cmpd="sng" algn="ctr">
+                      <a:solidFill>
+                        <a:schemeClr val="tx1"/>
+                      </a:solidFill>
+                      <a:prstDash val="solid"/>
+                      <a:round/>
+                      <a:headEnd type="none" w="med" len="med"/>
+                      <a:tailEnd type="none" w="med" len="med"/>
+                    </a:lnL>
+                    <a:lnR w="12700" cap="flat" cmpd="sng" algn="ctr">
+                      <a:solidFill>
+                        <a:schemeClr val="tx1"/>
+                      </a:solidFill>
+                      <a:prstDash val="solid"/>
+                      <a:round/>
+                      <a:headEnd type="none" w="med" len="med"/>
+                      <a:tailEnd type="none" w="med" len="med"/>
+                    </a:lnR>
+                    <a:lnT w="12700" cap="flat" cmpd="sng" algn="ctr">
+                      <a:solidFill>
+                        <a:schemeClr val="tx1"/>
+                      </a:solidFill>
+                      <a:prstDash val="solid"/>
+                      <a:round/>
+                      <a:headEnd type="none" w="med" len="med"/>
+                      <a:tailEnd type="none" w="med" len="med"/>
+                    </a:lnT>
+                    <a:lnB w="12700" cap="flat" cmpd="sng" algn="ctr">
+                      <a:solidFill>
+                        <a:schemeClr val="tx1"/>
+                      </a:solidFill>
+                      <a:prstDash val="solid"/>
+                      <a:round/>
+                      <a:headEnd type="none" w="med" len="med"/>
+                      <a:tailEnd type="none" w="med" len="med"/>
+                    </a:lnB>
+                    <a:noFill/>
+                  </a:tcPr>
                 </a:tc>
                 <a:tc gridSpan="2">
                   <a:txBody>
@@ -6929,14 +8836,59 @@
                     <a:p>
                       <a:r>
                         <a:rPr lang="en-US" sz="1100">
+                          <a:solidFill>
+                            <a:schemeClr val="tx1"/>
+                          </a:solidFill>
                           <a:effectLst/>
                         </a:rPr>
                         <a:t>Объект категории</a:t>
                       </a:r>
-                      <a:endParaRPr lang="ru-RU"/>
+                      <a:endParaRPr lang="ru-RU">
+                        <a:solidFill>
+                          <a:schemeClr val="tx1"/>
+                        </a:solidFill>
+                      </a:endParaRPr>
                     </a:p>
                   </a:txBody>
-                  <a:tcPr marL="27428" marR="27428" marT="0" marB="0"/>
+                  <a:tcPr marL="27428" marR="27428" marT="0" marB="0">
+                    <a:lnL w="12700" cap="flat" cmpd="sng" algn="ctr">
+                      <a:solidFill>
+                        <a:schemeClr val="tx1"/>
+                      </a:solidFill>
+                      <a:prstDash val="solid"/>
+                      <a:round/>
+                      <a:headEnd type="none" w="med" len="med"/>
+                      <a:tailEnd type="none" w="med" len="med"/>
+                    </a:lnL>
+                    <a:lnR w="12700" cap="flat" cmpd="sng" algn="ctr">
+                      <a:solidFill>
+                        <a:schemeClr val="tx1"/>
+                      </a:solidFill>
+                      <a:prstDash val="solid"/>
+                      <a:round/>
+                      <a:headEnd type="none" w="med" len="med"/>
+                      <a:tailEnd type="none" w="med" len="med"/>
+                    </a:lnR>
+                    <a:lnT w="12700" cap="flat" cmpd="sng" algn="ctr">
+                      <a:solidFill>
+                        <a:schemeClr val="tx1"/>
+                      </a:solidFill>
+                      <a:prstDash val="solid"/>
+                      <a:round/>
+                      <a:headEnd type="none" w="med" len="med"/>
+                      <a:tailEnd type="none" w="med" len="med"/>
+                    </a:lnT>
+                    <a:lnB w="12700" cap="flat" cmpd="sng" algn="ctr">
+                      <a:solidFill>
+                        <a:schemeClr val="tx1"/>
+                      </a:solidFill>
+                      <a:prstDash val="solid"/>
+                      <a:round/>
+                      <a:headEnd type="none" w="med" len="med"/>
+                      <a:tailEnd type="none" w="med" len="med"/>
+                    </a:lnB>
+                    <a:noFill/>
+                  </a:tcPr>
                 </a:tc>
                 <a:tc hMerge="1">
                   <a:txBody>
@@ -6960,18 +8912,62 @@
                       </a:pPr>
                       <a:r>
                         <a:rPr lang="en-US" sz="1100">
+                          <a:solidFill>
+                            <a:schemeClr val="tx1"/>
+                          </a:solidFill>
                           <a:effectLst/>
                         </a:rPr>
                         <a:t> </a:t>
                       </a:r>
                       <a:endParaRPr lang="ru-RU" sz="1100">
+                        <a:solidFill>
+                          <a:schemeClr val="tx1"/>
+                        </a:solidFill>
                         <a:effectLst/>
                         <a:latin typeface="Times New Roman" panose="02020603050405020304" pitchFamily="18" charset="0"/>
                         <a:ea typeface="Times New Roman" panose="02020603050405020304" pitchFamily="18" charset="0"/>
                       </a:endParaRPr>
                     </a:p>
                   </a:txBody>
-                  <a:tcPr marL="27428" marR="27428" marT="0" marB="0"/>
+                  <a:tcPr marL="27428" marR="27428" marT="0" marB="0">
+                    <a:lnL w="12700" cap="flat" cmpd="sng" algn="ctr">
+                      <a:solidFill>
+                        <a:schemeClr val="tx1"/>
+                      </a:solidFill>
+                      <a:prstDash val="solid"/>
+                      <a:round/>
+                      <a:headEnd type="none" w="med" len="med"/>
+                      <a:tailEnd type="none" w="med" len="med"/>
+                    </a:lnL>
+                    <a:lnR w="12700" cap="flat" cmpd="sng" algn="ctr">
+                      <a:solidFill>
+                        <a:schemeClr val="tx1"/>
+                      </a:solidFill>
+                      <a:prstDash val="solid"/>
+                      <a:round/>
+                      <a:headEnd type="none" w="med" len="med"/>
+                      <a:tailEnd type="none" w="med" len="med"/>
+                    </a:lnR>
+                    <a:lnT w="12700" cap="flat" cmpd="sng" algn="ctr">
+                      <a:solidFill>
+                        <a:schemeClr val="tx1"/>
+                      </a:solidFill>
+                      <a:prstDash val="solid"/>
+                      <a:round/>
+                      <a:headEnd type="none" w="med" len="med"/>
+                      <a:tailEnd type="none" w="med" len="med"/>
+                    </a:lnT>
+                    <a:lnB w="12700" cap="flat" cmpd="sng" algn="ctr">
+                      <a:solidFill>
+                        <a:schemeClr val="tx1"/>
+                      </a:solidFill>
+                      <a:prstDash val="solid"/>
+                      <a:round/>
+                      <a:headEnd type="none" w="med" len="med"/>
+                      <a:tailEnd type="none" w="med" len="med"/>
+                    </a:lnB>
+                    <a:noFill/>
+                  </a:tcPr>
                 </a:tc>
                 <a:extLst>
                   <a:ext uri="{0D108BD9-81ED-4DB2-BD59-A6C34878D82A}">
@@ -6992,18 +8988,62 @@
                       </a:pPr>
                       <a:r>
                         <a:rPr lang="en-US" sz="1100">
+                          <a:solidFill>
+                            <a:schemeClr val="tx1"/>
+                          </a:solidFill>
                           <a:effectLst/>
                         </a:rPr>
                         <a:t>2.1</a:t>
                       </a:r>
                       <a:endParaRPr lang="ru-RU" sz="1100">
+                        <a:solidFill>
+                          <a:schemeClr val="tx1"/>
+                        </a:solidFill>
                         <a:effectLst/>
                         <a:latin typeface="Times New Roman" panose="02020603050405020304" pitchFamily="18" charset="0"/>
                         <a:ea typeface="Times New Roman" panose="02020603050405020304" pitchFamily="18" charset="0"/>
                       </a:endParaRPr>
                     </a:p>
                   </a:txBody>
-                  <a:tcPr marL="27428" marR="27428" marT="0" marB="0"/>
+                  <a:tcPr marL="27428" marR="27428" marT="0" marB="0">
+                    <a:lnL w="12700" cap="flat" cmpd="sng" algn="ctr">
+                      <a:solidFill>
+                        <a:schemeClr val="tx1"/>
+                      </a:solidFill>
+                      <a:prstDash val="solid"/>
+                      <a:round/>
+                      <a:headEnd type="none" w="med" len="med"/>
+                      <a:tailEnd type="none" w="med" len="med"/>
+                    </a:lnL>
+                    <a:lnR w="12700" cap="flat" cmpd="sng" algn="ctr">
+                      <a:solidFill>
+                        <a:schemeClr val="tx1"/>
+                      </a:solidFill>
+                      <a:prstDash val="solid"/>
+                      <a:round/>
+                      <a:headEnd type="none" w="med" len="med"/>
+                      <a:tailEnd type="none" w="med" len="med"/>
+                    </a:lnR>
+                    <a:lnT w="12700" cap="flat" cmpd="sng" algn="ctr">
+                      <a:solidFill>
+                        <a:schemeClr val="tx1"/>
+                      </a:solidFill>
+                      <a:prstDash val="solid"/>
+                      <a:round/>
+                      <a:headEnd type="none" w="med" len="med"/>
+                      <a:tailEnd type="none" w="med" len="med"/>
+                    </a:lnT>
+                    <a:lnB w="12700" cap="flat" cmpd="sng" algn="ctr">
+                      <a:solidFill>
+                        <a:schemeClr val="tx1"/>
+                      </a:solidFill>
+                      <a:prstDash val="solid"/>
+                      <a:round/>
+                      <a:headEnd type="none" w="med" len="med"/>
+                      <a:tailEnd type="none" w="med" len="med"/>
+                    </a:lnB>
+                    <a:noFill/>
+                  </a:tcPr>
                 </a:tc>
                 <a:tc gridSpan="2">
                   <a:txBody>
@@ -7012,14 +9052,59 @@
                     <a:p>
                       <a:r>
                         <a:rPr lang="en-US" sz="1100">
+                          <a:solidFill>
+                            <a:schemeClr val="tx1"/>
+                          </a:solidFill>
                           <a:effectLst/>
                         </a:rPr>
                         <a:t>category.id</a:t>
                       </a:r>
-                      <a:endParaRPr lang="ru-RU"/>
+                      <a:endParaRPr lang="ru-RU">
+                        <a:solidFill>
+                          <a:schemeClr val="tx1"/>
+                        </a:solidFill>
+                      </a:endParaRPr>
                     </a:p>
                   </a:txBody>
-                  <a:tcPr marL="27428" marR="27428" marT="0" marB="0"/>
+                  <a:tcPr marL="27428" marR="27428" marT="0" marB="0">
+                    <a:lnL w="12700" cap="flat" cmpd="sng" algn="ctr">
+                      <a:solidFill>
+                        <a:schemeClr val="tx1"/>
+                      </a:solidFill>
+                      <a:prstDash val="solid"/>
+                      <a:round/>
+                      <a:headEnd type="none" w="med" len="med"/>
+                      <a:tailEnd type="none" w="med" len="med"/>
+                    </a:lnL>
+                    <a:lnR w="12700" cap="flat" cmpd="sng" algn="ctr">
+                      <a:solidFill>
+                        <a:schemeClr val="tx1"/>
+                      </a:solidFill>
+                      <a:prstDash val="solid"/>
+                      <a:round/>
+                      <a:headEnd type="none" w="med" len="med"/>
+                      <a:tailEnd type="none" w="med" len="med"/>
+                    </a:lnR>
+                    <a:lnT w="12700" cap="flat" cmpd="sng" algn="ctr">
+                      <a:solidFill>
+                        <a:schemeClr val="tx1"/>
+                      </a:solidFill>
+                      <a:prstDash val="solid"/>
+                      <a:round/>
+                      <a:headEnd type="none" w="med" len="med"/>
+                      <a:tailEnd type="none" w="med" len="med"/>
+                    </a:lnT>
+                    <a:lnB w="12700" cap="flat" cmpd="sng" algn="ctr">
+                      <a:solidFill>
+                        <a:schemeClr val="tx1"/>
+                      </a:solidFill>
+                      <a:prstDash val="solid"/>
+                      <a:round/>
+                      <a:headEnd type="none" w="med" len="med"/>
+                      <a:tailEnd type="none" w="med" len="med"/>
+                    </a:lnB>
+                    <a:noFill/>
+                  </a:tcPr>
                 </a:tc>
                 <a:tc hMerge="1">
                   <a:txBody>
@@ -7043,18 +9128,62 @@
                       </a:pPr>
                       <a:r>
                         <a:rPr lang="en-US" sz="1100">
+                          <a:solidFill>
+                            <a:schemeClr val="tx1"/>
+                          </a:solidFill>
                           <a:effectLst/>
                         </a:rPr>
                         <a:t>1..1</a:t>
                       </a:r>
                       <a:endParaRPr lang="ru-RU" sz="1100">
+                        <a:solidFill>
+                          <a:schemeClr val="tx1"/>
+                        </a:solidFill>
                         <a:effectLst/>
                         <a:latin typeface="Times New Roman" panose="02020603050405020304" pitchFamily="18" charset="0"/>
                         <a:ea typeface="Times New Roman" panose="02020603050405020304" pitchFamily="18" charset="0"/>
                       </a:endParaRPr>
                     </a:p>
                   </a:txBody>
-                  <a:tcPr marL="27428" marR="27428" marT="0" marB="0"/>
+                  <a:tcPr marL="27428" marR="27428" marT="0" marB="0">
+                    <a:lnL w="12700" cap="flat" cmpd="sng" algn="ctr">
+                      <a:solidFill>
+                        <a:schemeClr val="tx1"/>
+                      </a:solidFill>
+                      <a:prstDash val="solid"/>
+                      <a:round/>
+                      <a:headEnd type="none" w="med" len="med"/>
+                      <a:tailEnd type="none" w="med" len="med"/>
+                    </a:lnL>
+                    <a:lnR w="12700" cap="flat" cmpd="sng" algn="ctr">
+                      <a:solidFill>
+                        <a:schemeClr val="tx1"/>
+                      </a:solidFill>
+                      <a:prstDash val="solid"/>
+                      <a:round/>
+                      <a:headEnd type="none" w="med" len="med"/>
+                      <a:tailEnd type="none" w="med" len="med"/>
+                    </a:lnR>
+                    <a:lnT w="12700" cap="flat" cmpd="sng" algn="ctr">
+                      <a:solidFill>
+                        <a:schemeClr val="tx1"/>
+                      </a:solidFill>
+                      <a:prstDash val="solid"/>
+                      <a:round/>
+                      <a:headEnd type="none" w="med" len="med"/>
+                      <a:tailEnd type="none" w="med" len="med"/>
+                    </a:lnT>
+                    <a:lnB w="12700" cap="flat" cmpd="sng" algn="ctr">
+                      <a:solidFill>
+                        <a:schemeClr val="tx1"/>
+                      </a:solidFill>
+                      <a:prstDash val="solid"/>
+                      <a:round/>
+                      <a:headEnd type="none" w="med" len="med"/>
+                      <a:tailEnd type="none" w="med" len="med"/>
+                    </a:lnB>
+                    <a:noFill/>
+                  </a:tcPr>
                 </a:tc>
                 <a:tc gridSpan="2">
                   <a:txBody>
@@ -7063,14 +9192,59 @@
                     <a:p>
                       <a:r>
                         <a:rPr lang="en-US" sz="1100">
+                          <a:solidFill>
+                            <a:schemeClr val="tx1"/>
+                          </a:solidFill>
                           <a:effectLst/>
                         </a:rPr>
                         <a:t>Идентификатор категории</a:t>
                       </a:r>
-                      <a:endParaRPr lang="ru-RU"/>
+                      <a:endParaRPr lang="ru-RU">
+                        <a:solidFill>
+                          <a:schemeClr val="tx1"/>
+                        </a:solidFill>
+                      </a:endParaRPr>
                     </a:p>
                   </a:txBody>
-                  <a:tcPr marL="27428" marR="27428" marT="0" marB="0"/>
+                  <a:tcPr marL="27428" marR="27428" marT="0" marB="0">
+                    <a:lnL w="12700" cap="flat" cmpd="sng" algn="ctr">
+                      <a:solidFill>
+                        <a:schemeClr val="tx1"/>
+                      </a:solidFill>
+                      <a:prstDash val="solid"/>
+                      <a:round/>
+                      <a:headEnd type="none" w="med" len="med"/>
+                      <a:tailEnd type="none" w="med" len="med"/>
+                    </a:lnL>
+                    <a:lnR w="12700" cap="flat" cmpd="sng" algn="ctr">
+                      <a:solidFill>
+                        <a:schemeClr val="tx1"/>
+                      </a:solidFill>
+                      <a:prstDash val="solid"/>
+                      <a:round/>
+                      <a:headEnd type="none" w="med" len="med"/>
+                      <a:tailEnd type="none" w="med" len="med"/>
+                    </a:lnR>
+                    <a:lnT w="12700" cap="flat" cmpd="sng" algn="ctr">
+                      <a:solidFill>
+                        <a:schemeClr val="tx1"/>
+                      </a:solidFill>
+                      <a:prstDash val="solid"/>
+                      <a:round/>
+                      <a:headEnd type="none" w="med" len="med"/>
+                      <a:tailEnd type="none" w="med" len="med"/>
+                    </a:lnT>
+                    <a:lnB w="12700" cap="flat" cmpd="sng" algn="ctr">
+                      <a:solidFill>
+                        <a:schemeClr val="tx1"/>
+                      </a:solidFill>
+                      <a:prstDash val="solid"/>
+                      <a:round/>
+                      <a:headEnd type="none" w="med" len="med"/>
+                      <a:tailEnd type="none" w="med" len="med"/>
+                    </a:lnB>
+                    <a:noFill/>
+                  </a:tcPr>
                 </a:tc>
                 <a:tc hMerge="1">
                   <a:txBody>
@@ -7094,18 +9268,62 @@
                       </a:pPr>
                       <a:r>
                         <a:rPr lang="en-US" sz="1100">
+                          <a:solidFill>
+                            <a:schemeClr val="tx1"/>
+                          </a:solidFill>
                           <a:effectLst/>
                         </a:rPr>
                         <a:t>3</a:t>
                       </a:r>
                       <a:endParaRPr lang="ru-RU" sz="1100" dirty="0">
+                        <a:solidFill>
+                          <a:schemeClr val="tx1"/>
+                        </a:solidFill>
                         <a:effectLst/>
                         <a:latin typeface="Times New Roman" panose="02020603050405020304" pitchFamily="18" charset="0"/>
                         <a:ea typeface="Times New Roman" panose="02020603050405020304" pitchFamily="18" charset="0"/>
                       </a:endParaRPr>
                     </a:p>
                   </a:txBody>
-                  <a:tcPr marL="27428" marR="27428" marT="0" marB="0"/>
+                  <a:tcPr marL="27428" marR="27428" marT="0" marB="0">
+                    <a:lnL w="12700" cap="flat" cmpd="sng" algn="ctr">
+                      <a:solidFill>
+                        <a:schemeClr val="tx1"/>
+                      </a:solidFill>
+                      <a:prstDash val="solid"/>
+                      <a:round/>
+                      <a:headEnd type="none" w="med" len="med"/>
+                      <a:tailEnd type="none" w="med" len="med"/>
+                    </a:lnL>
+                    <a:lnR w="12700" cap="flat" cmpd="sng" algn="ctr">
+                      <a:solidFill>
+                        <a:schemeClr val="tx1"/>
+                      </a:solidFill>
+                      <a:prstDash val="solid"/>
+                      <a:round/>
+                      <a:headEnd type="none" w="med" len="med"/>
+                      <a:tailEnd type="none" w="med" len="med"/>
+                    </a:lnR>
+                    <a:lnT w="12700" cap="flat" cmpd="sng" algn="ctr">
+                      <a:solidFill>
+                        <a:schemeClr val="tx1"/>
+                      </a:solidFill>
+                      <a:prstDash val="solid"/>
+                      <a:round/>
+                      <a:headEnd type="none" w="med" len="med"/>
+                      <a:tailEnd type="none" w="med" len="med"/>
+                    </a:lnT>
+                    <a:lnB w="12700" cap="flat" cmpd="sng" algn="ctr">
+                      <a:solidFill>
+                        <a:schemeClr val="tx1"/>
+                      </a:solidFill>
+                      <a:prstDash val="solid"/>
+                      <a:round/>
+                      <a:headEnd type="none" w="med" len="med"/>
+                      <a:tailEnd type="none" w="med" len="med"/>
+                    </a:lnB>
+                    <a:noFill/>
+                  </a:tcPr>
                 </a:tc>
                 <a:extLst>
                   <a:ext uri="{0D108BD9-81ED-4DB2-BD59-A6C34878D82A}">
@@ -7126,18 +9344,62 @@
                       </a:pPr>
                       <a:r>
                         <a:rPr lang="en-US" sz="1100">
+                          <a:solidFill>
+                            <a:schemeClr val="tx1"/>
+                          </a:solidFill>
                           <a:effectLst/>
                         </a:rPr>
                         <a:t>2.2</a:t>
                       </a:r>
                       <a:endParaRPr lang="ru-RU" sz="1100">
+                        <a:solidFill>
+                          <a:schemeClr val="tx1"/>
+                        </a:solidFill>
                         <a:effectLst/>
                         <a:latin typeface="Times New Roman" panose="02020603050405020304" pitchFamily="18" charset="0"/>
                         <a:ea typeface="Times New Roman" panose="02020603050405020304" pitchFamily="18" charset="0"/>
                       </a:endParaRPr>
                     </a:p>
                   </a:txBody>
-                  <a:tcPr marL="27428" marR="27428" marT="0" marB="0"/>
+                  <a:tcPr marL="27428" marR="27428" marT="0" marB="0">
+                    <a:lnL w="12700" cap="flat" cmpd="sng" algn="ctr">
+                      <a:solidFill>
+                        <a:schemeClr val="tx1"/>
+                      </a:solidFill>
+                      <a:prstDash val="solid"/>
+                      <a:round/>
+                      <a:headEnd type="none" w="med" len="med"/>
+                      <a:tailEnd type="none" w="med" len="med"/>
+                    </a:lnL>
+                    <a:lnR w="12700" cap="flat" cmpd="sng" algn="ctr">
+                      <a:solidFill>
+                        <a:schemeClr val="tx1"/>
+                      </a:solidFill>
+                      <a:prstDash val="solid"/>
+                      <a:round/>
+                      <a:headEnd type="none" w="med" len="med"/>
+                      <a:tailEnd type="none" w="med" len="med"/>
+                    </a:lnR>
+                    <a:lnT w="12700" cap="flat" cmpd="sng" algn="ctr">
+                      <a:solidFill>
+                        <a:schemeClr val="tx1"/>
+                      </a:solidFill>
+                      <a:prstDash val="solid"/>
+                      <a:round/>
+                      <a:headEnd type="none" w="med" len="med"/>
+                      <a:tailEnd type="none" w="med" len="med"/>
+                    </a:lnT>
+                    <a:lnB w="12700" cap="flat" cmpd="sng" algn="ctr">
+                      <a:solidFill>
+                        <a:schemeClr val="tx1"/>
+                      </a:solidFill>
+                      <a:prstDash val="solid"/>
+                      <a:round/>
+                      <a:headEnd type="none" w="med" len="med"/>
+                      <a:tailEnd type="none" w="med" len="med"/>
+                    </a:lnB>
+                    <a:noFill/>
+                  </a:tcPr>
                 </a:tc>
                 <a:tc gridSpan="2">
                   <a:txBody>
@@ -7146,14 +9408,59 @@
                     <a:p>
                       <a:r>
                         <a:rPr lang="en-US" sz="1100">
+                          <a:solidFill>
+                            <a:schemeClr val="tx1"/>
+                          </a:solidFill>
                           <a:effectLst/>
                         </a:rPr>
                         <a:t>category.name</a:t>
                       </a:r>
-                      <a:endParaRPr lang="ru-RU"/>
+                      <a:endParaRPr lang="ru-RU">
+                        <a:solidFill>
+                          <a:schemeClr val="tx1"/>
+                        </a:solidFill>
+                      </a:endParaRPr>
                     </a:p>
                   </a:txBody>
-                  <a:tcPr marL="27428" marR="27428" marT="0" marB="0"/>
+                  <a:tcPr marL="27428" marR="27428" marT="0" marB="0">
+                    <a:lnL w="12700" cap="flat" cmpd="sng" algn="ctr">
+                      <a:solidFill>
+                        <a:schemeClr val="tx1"/>
+                      </a:solidFill>
+                      <a:prstDash val="solid"/>
+                      <a:round/>
+                      <a:headEnd type="none" w="med" len="med"/>
+                      <a:tailEnd type="none" w="med" len="med"/>
+                    </a:lnL>
+                    <a:lnR w="12700" cap="flat" cmpd="sng" algn="ctr">
+                      <a:solidFill>
+                        <a:schemeClr val="tx1"/>
+                      </a:solidFill>
+                      <a:prstDash val="solid"/>
+                      <a:round/>
+                      <a:headEnd type="none" w="med" len="med"/>
+                      <a:tailEnd type="none" w="med" len="med"/>
+                    </a:lnR>
+                    <a:lnT w="12700" cap="flat" cmpd="sng" algn="ctr">
+                      <a:solidFill>
+                        <a:schemeClr val="tx1"/>
+                      </a:solidFill>
+                      <a:prstDash val="solid"/>
+                      <a:round/>
+                      <a:headEnd type="none" w="med" len="med"/>
+                      <a:tailEnd type="none" w="med" len="med"/>
+                    </a:lnT>
+                    <a:lnB w="12700" cap="flat" cmpd="sng" algn="ctr">
+                      <a:solidFill>
+                        <a:schemeClr val="tx1"/>
+                      </a:solidFill>
+                      <a:prstDash val="solid"/>
+                      <a:round/>
+                      <a:headEnd type="none" w="med" len="med"/>
+                      <a:tailEnd type="none" w="med" len="med"/>
+                    </a:lnB>
+                    <a:noFill/>
+                  </a:tcPr>
                 </a:tc>
                 <a:tc hMerge="1">
                   <a:txBody>
@@ -7177,18 +9484,62 @@
                       </a:pPr>
                       <a:r>
                         <a:rPr lang="en-US" sz="1100">
+                          <a:solidFill>
+                            <a:schemeClr val="tx1"/>
+                          </a:solidFill>
                           <a:effectLst/>
                         </a:rPr>
                         <a:t>1..1</a:t>
                       </a:r>
                       <a:endParaRPr lang="ru-RU" sz="1100">
+                        <a:solidFill>
+                          <a:schemeClr val="tx1"/>
+                        </a:solidFill>
                         <a:effectLst/>
                         <a:latin typeface="Times New Roman" panose="02020603050405020304" pitchFamily="18" charset="0"/>
                         <a:ea typeface="Times New Roman" panose="02020603050405020304" pitchFamily="18" charset="0"/>
                       </a:endParaRPr>
                     </a:p>
                   </a:txBody>
-                  <a:tcPr marL="27428" marR="27428" marT="0" marB="0"/>
+                  <a:tcPr marL="27428" marR="27428" marT="0" marB="0">
+                    <a:lnL w="12700" cap="flat" cmpd="sng" algn="ctr">
+                      <a:solidFill>
+                        <a:schemeClr val="tx1"/>
+                      </a:solidFill>
+                      <a:prstDash val="solid"/>
+                      <a:round/>
+                      <a:headEnd type="none" w="med" len="med"/>
+                      <a:tailEnd type="none" w="med" len="med"/>
+                    </a:lnL>
+                    <a:lnR w="12700" cap="flat" cmpd="sng" algn="ctr">
+                      <a:solidFill>
+                        <a:schemeClr val="tx1"/>
+                      </a:solidFill>
+                      <a:prstDash val="solid"/>
+                      <a:round/>
+                      <a:headEnd type="none" w="med" len="med"/>
+                      <a:tailEnd type="none" w="med" len="med"/>
+                    </a:lnR>
+                    <a:lnT w="12700" cap="flat" cmpd="sng" algn="ctr">
+                      <a:solidFill>
+                        <a:schemeClr val="tx1"/>
+                      </a:solidFill>
+                      <a:prstDash val="solid"/>
+                      <a:round/>
+                      <a:headEnd type="none" w="med" len="med"/>
+                      <a:tailEnd type="none" w="med" len="med"/>
+                    </a:lnT>
+                    <a:lnB w="12700" cap="flat" cmpd="sng" algn="ctr">
+                      <a:solidFill>
+                        <a:schemeClr val="tx1"/>
+                      </a:solidFill>
+                      <a:prstDash val="solid"/>
+                      <a:round/>
+                      <a:headEnd type="none" w="med" len="med"/>
+                      <a:tailEnd type="none" w="med" len="med"/>
+                    </a:lnB>
+                    <a:noFill/>
+                  </a:tcPr>
                 </a:tc>
                 <a:tc gridSpan="2">
                   <a:txBody>
@@ -7197,14 +9548,59 @@
                     <a:p>
                       <a:r>
                         <a:rPr lang="en-US" sz="1100">
+                          <a:solidFill>
+                            <a:schemeClr val="tx1"/>
+                          </a:solidFill>
                           <a:effectLst/>
                         </a:rPr>
                         <a:t>Название категории</a:t>
                       </a:r>
-                      <a:endParaRPr lang="ru-RU"/>
+                      <a:endParaRPr lang="ru-RU">
+                        <a:solidFill>
+                          <a:schemeClr val="tx1"/>
+                        </a:solidFill>
+                      </a:endParaRPr>
                     </a:p>
                   </a:txBody>
-                  <a:tcPr marL="27428" marR="27428" marT="0" marB="0"/>
+                  <a:tcPr marL="27428" marR="27428" marT="0" marB="0">
+                    <a:lnL w="12700" cap="flat" cmpd="sng" algn="ctr">
+                      <a:solidFill>
+                        <a:schemeClr val="tx1"/>
+                      </a:solidFill>
+                      <a:prstDash val="solid"/>
+                      <a:round/>
+                      <a:headEnd type="none" w="med" len="med"/>
+                      <a:tailEnd type="none" w="med" len="med"/>
+                    </a:lnL>
+                    <a:lnR w="12700" cap="flat" cmpd="sng" algn="ctr">
+                      <a:solidFill>
+                        <a:schemeClr val="tx1"/>
+                      </a:solidFill>
+                      <a:prstDash val="solid"/>
+                      <a:round/>
+                      <a:headEnd type="none" w="med" len="med"/>
+                      <a:tailEnd type="none" w="med" len="med"/>
+                    </a:lnR>
+                    <a:lnT w="12700" cap="flat" cmpd="sng" algn="ctr">
+                      <a:solidFill>
+                        <a:schemeClr val="tx1"/>
+                      </a:solidFill>
+                      <a:prstDash val="solid"/>
+                      <a:round/>
+                      <a:headEnd type="none" w="med" len="med"/>
+                      <a:tailEnd type="none" w="med" len="med"/>
+                    </a:lnT>
+                    <a:lnB w="12700" cap="flat" cmpd="sng" algn="ctr">
+                      <a:solidFill>
+                        <a:schemeClr val="tx1"/>
+                      </a:solidFill>
+                      <a:prstDash val="solid"/>
+                      <a:round/>
+                      <a:headEnd type="none" w="med" len="med"/>
+                      <a:tailEnd type="none" w="med" len="med"/>
+                    </a:lnB>
+                    <a:noFill/>
+                  </a:tcPr>
                 </a:tc>
                 <a:tc hMerge="1">
                   <a:txBody>
@@ -7228,18 +9624,62 @@
                       </a:pPr>
                       <a:r>
                         <a:rPr lang="en-US" sz="1100">
+                          <a:solidFill>
+                            <a:schemeClr val="tx1"/>
+                          </a:solidFill>
                           <a:effectLst/>
                         </a:rPr>
                         <a:t>"Живопись"</a:t>
                       </a:r>
                       <a:endParaRPr lang="ru-RU" sz="1100" dirty="0">
+                        <a:solidFill>
+                          <a:schemeClr val="tx1"/>
+                        </a:solidFill>
                         <a:effectLst/>
                         <a:latin typeface="Times New Roman" panose="02020603050405020304" pitchFamily="18" charset="0"/>
                         <a:ea typeface="Times New Roman" panose="02020603050405020304" pitchFamily="18" charset="0"/>
                       </a:endParaRPr>
                     </a:p>
                   </a:txBody>
-                  <a:tcPr marL="27428" marR="27428" marT="0" marB="0"/>
+                  <a:tcPr marL="27428" marR="27428" marT="0" marB="0">
+                    <a:lnL w="12700" cap="flat" cmpd="sng" algn="ctr">
+                      <a:solidFill>
+                        <a:schemeClr val="tx1"/>
+                      </a:solidFill>
+                      <a:prstDash val="solid"/>
+                      <a:round/>
+                      <a:headEnd type="none" w="med" len="med"/>
+                      <a:tailEnd type="none" w="med" len="med"/>
+                    </a:lnL>
+                    <a:lnR w="12700" cap="flat" cmpd="sng" algn="ctr">
+                      <a:solidFill>
+                        <a:schemeClr val="tx1"/>
+                      </a:solidFill>
+                      <a:prstDash val="solid"/>
+                      <a:round/>
+                      <a:headEnd type="none" w="med" len="med"/>
+                      <a:tailEnd type="none" w="med" len="med"/>
+                    </a:lnR>
+                    <a:lnT w="12700" cap="flat" cmpd="sng" algn="ctr">
+                      <a:solidFill>
+                        <a:schemeClr val="tx1"/>
+                      </a:solidFill>
+                      <a:prstDash val="solid"/>
+                      <a:round/>
+                      <a:headEnd type="none" w="med" len="med"/>
+                      <a:tailEnd type="none" w="med" len="med"/>
+                    </a:lnT>
+                    <a:lnB w="12700" cap="flat" cmpd="sng" algn="ctr">
+                      <a:solidFill>
+                        <a:schemeClr val="tx1"/>
+                      </a:solidFill>
+                      <a:prstDash val="solid"/>
+                      <a:round/>
+                      <a:headEnd type="none" w="med" len="med"/>
+                      <a:tailEnd type="none" w="med" len="med"/>
+                    </a:lnB>
+                    <a:noFill/>
+                  </a:tcPr>
                 </a:tc>
                 <a:extLst>
                   <a:ext uri="{0D108BD9-81ED-4DB2-BD59-A6C34878D82A}">
@@ -7260,18 +9700,62 @@
                       </a:pPr>
                       <a:r>
                         <a:rPr lang="en-US" sz="1100">
+                          <a:solidFill>
+                            <a:schemeClr val="tx1"/>
+                          </a:solidFill>
                           <a:effectLst/>
                         </a:rPr>
                         <a:t>2.3</a:t>
                       </a:r>
                       <a:endParaRPr lang="ru-RU" sz="1100">
+                        <a:solidFill>
+                          <a:schemeClr val="tx1"/>
+                        </a:solidFill>
                         <a:effectLst/>
                         <a:latin typeface="Times New Roman" panose="02020603050405020304" pitchFamily="18" charset="0"/>
                         <a:ea typeface="Times New Roman" panose="02020603050405020304" pitchFamily="18" charset="0"/>
                       </a:endParaRPr>
                     </a:p>
                   </a:txBody>
-                  <a:tcPr marL="27428" marR="27428" marT="0" marB="0"/>
+                  <a:tcPr marL="27428" marR="27428" marT="0" marB="0">
+                    <a:lnL w="12700" cap="flat" cmpd="sng" algn="ctr">
+                      <a:solidFill>
+                        <a:schemeClr val="tx1"/>
+                      </a:solidFill>
+                      <a:prstDash val="solid"/>
+                      <a:round/>
+                      <a:headEnd type="none" w="med" len="med"/>
+                      <a:tailEnd type="none" w="med" len="med"/>
+                    </a:lnL>
+                    <a:lnR w="12700" cap="flat" cmpd="sng" algn="ctr">
+                      <a:solidFill>
+                        <a:schemeClr val="tx1"/>
+                      </a:solidFill>
+                      <a:prstDash val="solid"/>
+                      <a:round/>
+                      <a:headEnd type="none" w="med" len="med"/>
+                      <a:tailEnd type="none" w="med" len="med"/>
+                    </a:lnR>
+                    <a:lnT w="12700" cap="flat" cmpd="sng" algn="ctr">
+                      <a:solidFill>
+                        <a:schemeClr val="tx1"/>
+                      </a:solidFill>
+                      <a:prstDash val="solid"/>
+                      <a:round/>
+                      <a:headEnd type="none" w="med" len="med"/>
+                      <a:tailEnd type="none" w="med" len="med"/>
+                    </a:lnT>
+                    <a:lnB w="12700" cap="flat" cmpd="sng" algn="ctr">
+                      <a:solidFill>
+                        <a:schemeClr val="tx1"/>
+                      </a:solidFill>
+                      <a:prstDash val="solid"/>
+                      <a:round/>
+                      <a:headEnd type="none" w="med" len="med"/>
+                      <a:tailEnd type="none" w="med" len="med"/>
+                    </a:lnB>
+                    <a:noFill/>
+                  </a:tcPr>
                 </a:tc>
                 <a:tc gridSpan="2">
                   <a:txBody>
@@ -7280,14 +9764,59 @@
                     <a:p>
                       <a:r>
                         <a:rPr lang="en-US" sz="1100">
+                          <a:solidFill>
+                            <a:schemeClr val="tx1"/>
+                          </a:solidFill>
                           <a:effectLst/>
                         </a:rPr>
                         <a:t>category.description</a:t>
                       </a:r>
-                      <a:endParaRPr lang="ru-RU"/>
+                      <a:endParaRPr lang="ru-RU">
+                        <a:solidFill>
+                          <a:schemeClr val="tx1"/>
+                        </a:solidFill>
+                      </a:endParaRPr>
                     </a:p>
                   </a:txBody>
-                  <a:tcPr marL="27428" marR="27428" marT="0" marB="0"/>
+                  <a:tcPr marL="27428" marR="27428" marT="0" marB="0">
+                    <a:lnL w="12700" cap="flat" cmpd="sng" algn="ctr">
+                      <a:solidFill>
+                        <a:schemeClr val="tx1"/>
+                      </a:solidFill>
+                      <a:prstDash val="solid"/>
+                      <a:round/>
+                      <a:headEnd type="none" w="med" len="med"/>
+                      <a:tailEnd type="none" w="med" len="med"/>
+                    </a:lnL>
+                    <a:lnR w="12700" cap="flat" cmpd="sng" algn="ctr">
+                      <a:solidFill>
+                        <a:schemeClr val="tx1"/>
+                      </a:solidFill>
+                      <a:prstDash val="solid"/>
+                      <a:round/>
+                      <a:headEnd type="none" w="med" len="med"/>
+                      <a:tailEnd type="none" w="med" len="med"/>
+                    </a:lnR>
+                    <a:lnT w="12700" cap="flat" cmpd="sng" algn="ctr">
+                      <a:solidFill>
+                        <a:schemeClr val="tx1"/>
+                      </a:solidFill>
+                      <a:prstDash val="solid"/>
+                      <a:round/>
+                      <a:headEnd type="none" w="med" len="med"/>
+                      <a:tailEnd type="none" w="med" len="med"/>
+                    </a:lnT>
+                    <a:lnB w="12700" cap="flat" cmpd="sng" algn="ctr">
+                      <a:solidFill>
+                        <a:schemeClr val="tx1"/>
+                      </a:solidFill>
+                      <a:prstDash val="solid"/>
+                      <a:round/>
+                      <a:headEnd type="none" w="med" len="med"/>
+                      <a:tailEnd type="none" w="med" len="med"/>
+                    </a:lnB>
+                    <a:noFill/>
+                  </a:tcPr>
                 </a:tc>
                 <a:tc hMerge="1">
                   <a:txBody>
@@ -7311,18 +9840,62 @@
                       </a:pPr>
                       <a:r>
                         <a:rPr lang="en-US" sz="1100">
+                          <a:solidFill>
+                            <a:schemeClr val="tx1"/>
+                          </a:solidFill>
                           <a:effectLst/>
                         </a:rPr>
                         <a:t>0..1</a:t>
                       </a:r>
                       <a:endParaRPr lang="ru-RU" sz="1100">
+                        <a:solidFill>
+                          <a:schemeClr val="tx1"/>
+                        </a:solidFill>
                         <a:effectLst/>
                         <a:latin typeface="Times New Roman" panose="02020603050405020304" pitchFamily="18" charset="0"/>
                         <a:ea typeface="Times New Roman" panose="02020603050405020304" pitchFamily="18" charset="0"/>
                       </a:endParaRPr>
                     </a:p>
                   </a:txBody>
-                  <a:tcPr marL="27428" marR="27428" marT="0" marB="0"/>
+                  <a:tcPr marL="27428" marR="27428" marT="0" marB="0">
+                    <a:lnL w="12700" cap="flat" cmpd="sng" algn="ctr">
+                      <a:solidFill>
+                        <a:schemeClr val="tx1"/>
+                      </a:solidFill>
+                      <a:prstDash val="solid"/>
+                      <a:round/>
+                      <a:headEnd type="none" w="med" len="med"/>
+                      <a:tailEnd type="none" w="med" len="med"/>
+                    </a:lnL>
+                    <a:lnR w="12700" cap="flat" cmpd="sng" algn="ctr">
+                      <a:solidFill>
+                        <a:schemeClr val="tx1"/>
+                      </a:solidFill>
+                      <a:prstDash val="solid"/>
+                      <a:round/>
+                      <a:headEnd type="none" w="med" len="med"/>
+                      <a:tailEnd type="none" w="med" len="med"/>
+                    </a:lnR>
+                    <a:lnT w="12700" cap="flat" cmpd="sng" algn="ctr">
+                      <a:solidFill>
+                        <a:schemeClr val="tx1"/>
+                      </a:solidFill>
+                      <a:prstDash val="solid"/>
+                      <a:round/>
+                      <a:headEnd type="none" w="med" len="med"/>
+                      <a:tailEnd type="none" w="med" len="med"/>
+                    </a:lnT>
+                    <a:lnB w="12700" cap="flat" cmpd="sng" algn="ctr">
+                      <a:solidFill>
+                        <a:schemeClr val="tx1"/>
+                      </a:solidFill>
+                      <a:prstDash val="solid"/>
+                      <a:round/>
+                      <a:headEnd type="none" w="med" len="med"/>
+                      <a:tailEnd type="none" w="med" len="med"/>
+                    </a:lnB>
+                    <a:noFill/>
+                  </a:tcPr>
                 </a:tc>
                 <a:tc gridSpan="2">
                   <a:txBody>
@@ -7331,14 +9904,59 @@
                     <a:p>
                       <a:r>
                         <a:rPr lang="en-US" sz="1100">
+                          <a:solidFill>
+                            <a:schemeClr val="tx1"/>
+                          </a:solidFill>
                           <a:effectLst/>
                         </a:rPr>
                         <a:t>Описание категории</a:t>
                       </a:r>
-                      <a:endParaRPr lang="ru-RU"/>
+                      <a:endParaRPr lang="ru-RU">
+                        <a:solidFill>
+                          <a:schemeClr val="tx1"/>
+                        </a:solidFill>
+                      </a:endParaRPr>
                     </a:p>
                   </a:txBody>
-                  <a:tcPr marL="27428" marR="27428" marT="0" marB="0"/>
+                  <a:tcPr marL="27428" marR="27428" marT="0" marB="0">
+                    <a:lnL w="12700" cap="flat" cmpd="sng" algn="ctr">
+                      <a:solidFill>
+                        <a:schemeClr val="tx1"/>
+                      </a:solidFill>
+                      <a:prstDash val="solid"/>
+                      <a:round/>
+                      <a:headEnd type="none" w="med" len="med"/>
+                      <a:tailEnd type="none" w="med" len="med"/>
+                    </a:lnL>
+                    <a:lnR w="12700" cap="flat" cmpd="sng" algn="ctr">
+                      <a:solidFill>
+                        <a:schemeClr val="tx1"/>
+                      </a:solidFill>
+                      <a:prstDash val="solid"/>
+                      <a:round/>
+                      <a:headEnd type="none" w="med" len="med"/>
+                      <a:tailEnd type="none" w="med" len="med"/>
+                    </a:lnR>
+                    <a:lnT w="12700" cap="flat" cmpd="sng" algn="ctr">
+                      <a:solidFill>
+                        <a:schemeClr val="tx1"/>
+                      </a:solidFill>
+                      <a:prstDash val="solid"/>
+                      <a:round/>
+                      <a:headEnd type="none" w="med" len="med"/>
+                      <a:tailEnd type="none" w="med" len="med"/>
+                    </a:lnT>
+                    <a:lnB w="12700" cap="flat" cmpd="sng" algn="ctr">
+                      <a:solidFill>
+                        <a:schemeClr val="tx1"/>
+                      </a:solidFill>
+                      <a:prstDash val="solid"/>
+                      <a:round/>
+                      <a:headEnd type="none" w="med" len="med"/>
+                      <a:tailEnd type="none" w="med" len="med"/>
+                    </a:lnB>
+                    <a:noFill/>
+                  </a:tcPr>
                 </a:tc>
                 <a:tc hMerge="1">
                   <a:txBody>
@@ -7362,18 +9980,62 @@
                       </a:pPr>
                       <a:r>
                         <a:rPr lang="en-US" sz="1100">
+                          <a:solidFill>
+                            <a:schemeClr val="tx1"/>
+                          </a:solidFill>
                           <a:effectLst/>
                         </a:rPr>
                         <a:t>"Классическая живопись"</a:t>
                       </a:r>
                       <a:endParaRPr lang="ru-RU" sz="1100" dirty="0">
+                        <a:solidFill>
+                          <a:schemeClr val="tx1"/>
+                        </a:solidFill>
                         <a:effectLst/>
                         <a:latin typeface="Times New Roman" panose="02020603050405020304" pitchFamily="18" charset="0"/>
                         <a:ea typeface="Times New Roman" panose="02020603050405020304" pitchFamily="18" charset="0"/>
                       </a:endParaRPr>
                     </a:p>
                   </a:txBody>
-                  <a:tcPr marL="27428" marR="27428" marT="0" marB="0"/>
+                  <a:tcPr marL="27428" marR="27428" marT="0" marB="0">
+                    <a:lnL w="12700" cap="flat" cmpd="sng" algn="ctr">
+                      <a:solidFill>
+                        <a:schemeClr val="tx1"/>
+                      </a:solidFill>
+                      <a:prstDash val="solid"/>
+                      <a:round/>
+                      <a:headEnd type="none" w="med" len="med"/>
+                      <a:tailEnd type="none" w="med" len="med"/>
+                    </a:lnL>
+                    <a:lnR w="12700" cap="flat" cmpd="sng" algn="ctr">
+                      <a:solidFill>
+                        <a:schemeClr val="tx1"/>
+                      </a:solidFill>
+                      <a:prstDash val="solid"/>
+                      <a:round/>
+                      <a:headEnd type="none" w="med" len="med"/>
+                      <a:tailEnd type="none" w="med" len="med"/>
+                    </a:lnR>
+                    <a:lnT w="12700" cap="flat" cmpd="sng" algn="ctr">
+                      <a:solidFill>
+                        <a:schemeClr val="tx1"/>
+                      </a:solidFill>
+                      <a:prstDash val="solid"/>
+                      <a:round/>
+                      <a:headEnd type="none" w="med" len="med"/>
+                      <a:tailEnd type="none" w="med" len="med"/>
+                    </a:lnT>
+                    <a:lnB w="12700" cap="flat" cmpd="sng" algn="ctr">
+                      <a:solidFill>
+                        <a:schemeClr val="tx1"/>
+                      </a:solidFill>
+                      <a:prstDash val="solid"/>
+                      <a:round/>
+                      <a:headEnd type="none" w="med" len="med"/>
+                      <a:tailEnd type="none" w="med" len="med"/>
+                    </a:lnB>
+                    <a:noFill/>
+                  </a:tcPr>
                 </a:tc>
                 <a:extLst>
                   <a:ext uri="{0D108BD9-81ED-4DB2-BD59-A6C34878D82A}">
@@ -7394,18 +10056,62 @@
                       </a:pPr>
                       <a:r>
                         <a:rPr lang="en-US" sz="1100">
+                          <a:solidFill>
+                            <a:schemeClr val="tx1"/>
+                          </a:solidFill>
                           <a:effectLst/>
                         </a:rPr>
                         <a:t>2.4</a:t>
                       </a:r>
                       <a:endParaRPr lang="ru-RU" sz="1100">
+                        <a:solidFill>
+                          <a:schemeClr val="tx1"/>
+                        </a:solidFill>
                         <a:effectLst/>
                         <a:latin typeface="Times New Roman" panose="02020603050405020304" pitchFamily="18" charset="0"/>
                         <a:ea typeface="Times New Roman" panose="02020603050405020304" pitchFamily="18" charset="0"/>
                       </a:endParaRPr>
                     </a:p>
                   </a:txBody>
-                  <a:tcPr marL="27428" marR="27428" marT="0" marB="0"/>
+                  <a:tcPr marL="27428" marR="27428" marT="0" marB="0">
+                    <a:lnL w="12700" cap="flat" cmpd="sng" algn="ctr">
+                      <a:solidFill>
+                        <a:schemeClr val="tx1"/>
+                      </a:solidFill>
+                      <a:prstDash val="solid"/>
+                      <a:round/>
+                      <a:headEnd type="none" w="med" len="med"/>
+                      <a:tailEnd type="none" w="med" len="med"/>
+                    </a:lnL>
+                    <a:lnR w="12700" cap="flat" cmpd="sng" algn="ctr">
+                      <a:solidFill>
+                        <a:schemeClr val="tx1"/>
+                      </a:solidFill>
+                      <a:prstDash val="solid"/>
+                      <a:round/>
+                      <a:headEnd type="none" w="med" len="med"/>
+                      <a:tailEnd type="none" w="med" len="med"/>
+                    </a:lnR>
+                    <a:lnT w="12700" cap="flat" cmpd="sng" algn="ctr">
+                      <a:solidFill>
+                        <a:schemeClr val="tx1"/>
+                      </a:solidFill>
+                      <a:prstDash val="solid"/>
+                      <a:round/>
+                      <a:headEnd type="none" w="med" len="med"/>
+                      <a:tailEnd type="none" w="med" len="med"/>
+                    </a:lnT>
+                    <a:lnB w="12700" cap="flat" cmpd="sng" algn="ctr">
+                      <a:solidFill>
+                        <a:schemeClr val="tx1"/>
+                      </a:solidFill>
+                      <a:prstDash val="solid"/>
+                      <a:round/>
+                      <a:headEnd type="none" w="med" len="med"/>
+                      <a:tailEnd type="none" w="med" len="med"/>
+                    </a:lnB>
+                    <a:noFill/>
+                  </a:tcPr>
                 </a:tc>
                 <a:tc gridSpan="2">
                   <a:txBody>
@@ -7414,14 +10120,59 @@
                     <a:p>
                       <a:r>
                         <a:rPr lang="en-US" sz="1100" dirty="0" err="1">
+                          <a:solidFill>
+                            <a:schemeClr val="tx1"/>
+                          </a:solidFill>
                           <a:effectLst/>
                         </a:rPr>
                         <a:t>category.approvedArtworksCount</a:t>
                       </a:r>
-                      <a:endParaRPr lang="ru-RU" dirty="0"/>
+                      <a:endParaRPr lang="ru-RU" dirty="0">
+                        <a:solidFill>
+                          <a:schemeClr val="tx1"/>
+                        </a:solidFill>
+                      </a:endParaRPr>
                     </a:p>
                   </a:txBody>
-                  <a:tcPr marL="27428" marR="27428" marT="0" marB="0"/>
+                  <a:tcPr marL="27428" marR="27428" marT="0" marB="0">
+                    <a:lnL w="12700" cap="flat" cmpd="sng" algn="ctr">
+                      <a:solidFill>
+                        <a:schemeClr val="tx1"/>
+                      </a:solidFill>
+                      <a:prstDash val="solid"/>
+                      <a:round/>
+                      <a:headEnd type="none" w="med" len="med"/>
+                      <a:tailEnd type="none" w="med" len="med"/>
+                    </a:lnL>
+                    <a:lnR w="12700" cap="flat" cmpd="sng" algn="ctr">
+                      <a:solidFill>
+                        <a:schemeClr val="tx1"/>
+                      </a:solidFill>
+                      <a:prstDash val="solid"/>
+                      <a:round/>
+                      <a:headEnd type="none" w="med" len="med"/>
+                      <a:tailEnd type="none" w="med" len="med"/>
+                    </a:lnR>
+                    <a:lnT w="12700" cap="flat" cmpd="sng" algn="ctr">
+                      <a:solidFill>
+                        <a:schemeClr val="tx1"/>
+                      </a:solidFill>
+                      <a:prstDash val="solid"/>
+                      <a:round/>
+                      <a:headEnd type="none" w="med" len="med"/>
+                      <a:tailEnd type="none" w="med" len="med"/>
+                    </a:lnT>
+                    <a:lnB w="12700" cap="flat" cmpd="sng" algn="ctr">
+                      <a:solidFill>
+                        <a:schemeClr val="tx1"/>
+                      </a:solidFill>
+                      <a:prstDash val="solid"/>
+                      <a:round/>
+                      <a:headEnd type="none" w="med" len="med"/>
+                      <a:tailEnd type="none" w="med" len="med"/>
+                    </a:lnB>
+                    <a:noFill/>
+                  </a:tcPr>
                 </a:tc>
                 <a:tc hMerge="1">
                   <a:txBody>
@@ -7445,18 +10196,62 @@
                       </a:pPr>
                       <a:r>
                         <a:rPr lang="en-US" sz="1100">
+                          <a:solidFill>
+                            <a:schemeClr val="tx1"/>
+                          </a:solidFill>
                           <a:effectLst/>
                         </a:rPr>
                         <a:t>1..1</a:t>
                       </a:r>
                       <a:endParaRPr lang="ru-RU" sz="1100">
+                        <a:solidFill>
+                          <a:schemeClr val="tx1"/>
+                        </a:solidFill>
                         <a:effectLst/>
                         <a:latin typeface="Times New Roman" panose="02020603050405020304" pitchFamily="18" charset="0"/>
                         <a:ea typeface="Times New Roman" panose="02020603050405020304" pitchFamily="18" charset="0"/>
                       </a:endParaRPr>
                     </a:p>
                   </a:txBody>
-                  <a:tcPr marL="27428" marR="27428" marT="0" marB="0"/>
+                  <a:tcPr marL="27428" marR="27428" marT="0" marB="0">
+                    <a:lnL w="12700" cap="flat" cmpd="sng" algn="ctr">
+                      <a:solidFill>
+                        <a:schemeClr val="tx1"/>
+                      </a:solidFill>
+                      <a:prstDash val="solid"/>
+                      <a:round/>
+                      <a:headEnd type="none" w="med" len="med"/>
+                      <a:tailEnd type="none" w="med" len="med"/>
+                    </a:lnL>
+                    <a:lnR w="12700" cap="flat" cmpd="sng" algn="ctr">
+                      <a:solidFill>
+                        <a:schemeClr val="tx1"/>
+                      </a:solidFill>
+                      <a:prstDash val="solid"/>
+                      <a:round/>
+                      <a:headEnd type="none" w="med" len="med"/>
+                      <a:tailEnd type="none" w="med" len="med"/>
+                    </a:lnR>
+                    <a:lnT w="12700" cap="flat" cmpd="sng" algn="ctr">
+                      <a:solidFill>
+                        <a:schemeClr val="tx1"/>
+                      </a:solidFill>
+                      <a:prstDash val="solid"/>
+                      <a:round/>
+                      <a:headEnd type="none" w="med" len="med"/>
+                      <a:tailEnd type="none" w="med" len="med"/>
+                    </a:lnT>
+                    <a:lnB w="12700" cap="flat" cmpd="sng" algn="ctr">
+                      <a:solidFill>
+                        <a:schemeClr val="tx1"/>
+                      </a:solidFill>
+                      <a:prstDash val="solid"/>
+                      <a:round/>
+                      <a:headEnd type="none" w="med" len="med"/>
+                      <a:tailEnd type="none" w="med" len="med"/>
+                    </a:lnB>
+                    <a:noFill/>
+                  </a:tcPr>
                 </a:tc>
                 <a:tc gridSpan="2">
                   <a:txBody>
@@ -7465,38 +10260,95 @@
                     <a:p>
                       <a:r>
                         <a:rPr lang="en-US" sz="1100" dirty="0" err="1">
+                          <a:solidFill>
+                            <a:schemeClr val="tx1"/>
+                          </a:solidFill>
                           <a:effectLst/>
                         </a:rPr>
                         <a:t>Количество</a:t>
                       </a:r>
                       <a:r>
                         <a:rPr lang="en-US" sz="1100" dirty="0">
+                          <a:solidFill>
+                            <a:schemeClr val="tx1"/>
+                          </a:solidFill>
                           <a:effectLst/>
                         </a:rPr>
                         <a:t> </a:t>
                       </a:r>
                       <a:r>
                         <a:rPr lang="en-US" sz="1100" dirty="0" err="1">
+                          <a:solidFill>
+                            <a:schemeClr val="tx1"/>
+                          </a:solidFill>
                           <a:effectLst/>
                         </a:rPr>
                         <a:t>одобренных</a:t>
                       </a:r>
                       <a:r>
                         <a:rPr lang="en-US" sz="1100" dirty="0">
+                          <a:solidFill>
+                            <a:schemeClr val="tx1"/>
+                          </a:solidFill>
                           <a:effectLst/>
                         </a:rPr>
                         <a:t> </a:t>
                       </a:r>
                       <a:r>
                         <a:rPr lang="en-US" sz="1100" dirty="0" err="1">
+                          <a:solidFill>
+                            <a:schemeClr val="tx1"/>
+                          </a:solidFill>
                           <a:effectLst/>
                         </a:rPr>
                         <a:t>работ</a:t>
                       </a:r>
-                      <a:endParaRPr lang="ru-RU" dirty="0"/>
+                      <a:endParaRPr lang="ru-RU" dirty="0">
+                        <a:solidFill>
+                          <a:schemeClr val="tx1"/>
+                        </a:solidFill>
+                      </a:endParaRPr>
                     </a:p>
                   </a:txBody>
-                  <a:tcPr marL="27428" marR="27428" marT="0" marB="0"/>
+                  <a:tcPr marL="27428" marR="27428" marT="0" marB="0">
+                    <a:lnL w="12700" cap="flat" cmpd="sng" algn="ctr">
+                      <a:solidFill>
+                        <a:schemeClr val="tx1"/>
+                      </a:solidFill>
+                      <a:prstDash val="solid"/>
+                      <a:round/>
+                      <a:headEnd type="none" w="med" len="med"/>
+                      <a:tailEnd type="none" w="med" len="med"/>
+                    </a:lnL>
+                    <a:lnR w="12700" cap="flat" cmpd="sng" algn="ctr">
+                      <a:solidFill>
+                        <a:schemeClr val="tx1"/>
+                      </a:solidFill>
+                      <a:prstDash val="solid"/>
+                      <a:round/>
+                      <a:headEnd type="none" w="med" len="med"/>
+                      <a:tailEnd type="none" w="med" len="med"/>
+                    </a:lnR>
+                    <a:lnT w="12700" cap="flat" cmpd="sng" algn="ctr">
+                      <a:solidFill>
+                        <a:schemeClr val="tx1"/>
+                      </a:solidFill>
+                      <a:prstDash val="solid"/>
+                      <a:round/>
+                      <a:headEnd type="none" w="med" len="med"/>
+                      <a:tailEnd type="none" w="med" len="med"/>
+                    </a:lnT>
+                    <a:lnB w="12700" cap="flat" cmpd="sng" algn="ctr">
+                      <a:solidFill>
+                        <a:schemeClr val="tx1"/>
+                      </a:solidFill>
+                      <a:prstDash val="solid"/>
+                      <a:round/>
+                      <a:headEnd type="none" w="med" len="med"/>
+                      <a:tailEnd type="none" w="med" len="med"/>
+                    </a:lnB>
+                    <a:noFill/>
+                  </a:tcPr>
                 </a:tc>
                 <a:tc hMerge="1">
                   <a:txBody>
@@ -7520,18 +10372,62 @@
                       </a:pPr>
                       <a:r>
                         <a:rPr lang="en-US" sz="1100" dirty="0">
+                          <a:solidFill>
+                            <a:schemeClr val="tx1"/>
+                          </a:solidFill>
                           <a:effectLst/>
                         </a:rPr>
                         <a:t>25</a:t>
                       </a:r>
                       <a:endParaRPr lang="ru-RU" sz="1100" dirty="0">
+                        <a:solidFill>
+                          <a:schemeClr val="tx1"/>
+                        </a:solidFill>
                         <a:effectLst/>
                         <a:latin typeface="Times New Roman" panose="02020603050405020304" pitchFamily="18" charset="0"/>
                         <a:ea typeface="Times New Roman" panose="02020603050405020304" pitchFamily="18" charset="0"/>
                       </a:endParaRPr>
                     </a:p>
                   </a:txBody>
-                  <a:tcPr marL="27428" marR="27428" marT="0" marB="0"/>
+                  <a:tcPr marL="27428" marR="27428" marT="0" marB="0">
+                    <a:lnL w="12700" cap="flat" cmpd="sng" algn="ctr">
+                      <a:solidFill>
+                        <a:schemeClr val="tx1"/>
+                      </a:solidFill>
+                      <a:prstDash val="solid"/>
+                      <a:round/>
+                      <a:headEnd type="none" w="med" len="med"/>
+                      <a:tailEnd type="none" w="med" len="med"/>
+                    </a:lnL>
+                    <a:lnR w="12700" cap="flat" cmpd="sng" algn="ctr">
+                      <a:solidFill>
+                        <a:schemeClr val="tx1"/>
+                      </a:solidFill>
+                      <a:prstDash val="solid"/>
+                      <a:round/>
+                      <a:headEnd type="none" w="med" len="med"/>
+                      <a:tailEnd type="none" w="med" len="med"/>
+                    </a:lnR>
+                    <a:lnT w="12700" cap="flat" cmpd="sng" algn="ctr">
+                      <a:solidFill>
+                        <a:schemeClr val="tx1"/>
+                      </a:solidFill>
+                      <a:prstDash val="solid"/>
+                      <a:round/>
+                      <a:headEnd type="none" w="med" len="med"/>
+                      <a:tailEnd type="none" w="med" len="med"/>
+                    </a:lnT>
+                    <a:lnB w="12700" cap="flat" cmpd="sng" algn="ctr">
+                      <a:solidFill>
+                        <a:schemeClr val="tx1"/>
+                      </a:solidFill>
+                      <a:prstDash val="solid"/>
+                      <a:round/>
+                      <a:headEnd type="none" w="med" len="med"/>
+                      <a:tailEnd type="none" w="med" len="med"/>
+                    </a:lnB>
+                    <a:noFill/>
+                  </a:tcPr>
                 </a:tc>
                 <a:extLst>
                   <a:ext uri="{0D108BD9-81ED-4DB2-BD59-A6C34878D82A}">

--- a/Документы/ИСТ122_ТРМП_КП_Презентация_Жминьковская.pptx
+++ b/Документы/ИСТ122_ТРМП_КП_Презентация_Жминьковская.pptx
@@ -5,7 +5,7 @@
     <p:sldMasterId id="2147484054" r:id="rId1"/>
   </p:sldMasterIdLst>
   <p:notesMasterIdLst>
-    <p:notesMasterId r:id="rId24"/>
+    <p:notesMasterId r:id="rId23"/>
   </p:notesMasterIdLst>
   <p:sldIdLst>
     <p:sldId id="256" r:id="rId2"/>
@@ -22,14 +22,13 @@
     <p:sldId id="330" r:id="rId13"/>
     <p:sldId id="329" r:id="rId14"/>
     <p:sldId id="328" r:id="rId15"/>
-    <p:sldId id="319" r:id="rId16"/>
-    <p:sldId id="333" r:id="rId17"/>
-    <p:sldId id="335" r:id="rId18"/>
-    <p:sldId id="336" r:id="rId19"/>
-    <p:sldId id="334" r:id="rId20"/>
-    <p:sldId id="318" r:id="rId21"/>
-    <p:sldId id="272" r:id="rId22"/>
-    <p:sldId id="274" r:id="rId23"/>
+    <p:sldId id="333" r:id="rId16"/>
+    <p:sldId id="335" r:id="rId17"/>
+    <p:sldId id="336" r:id="rId18"/>
+    <p:sldId id="334" r:id="rId19"/>
+    <p:sldId id="318" r:id="rId20"/>
+    <p:sldId id="272" r:id="rId21"/>
+    <p:sldId id="274" r:id="rId22"/>
   </p:sldIdLst>
   <p:sldSz cx="12192000" cy="6858000"/>
   <p:notesSz cx="6858000" cy="9144000"/>
@@ -11245,7 +11244,7 @@
     </p:spTree>
     <p:extLst>
       <p:ext uri="{BB962C8B-B14F-4D97-AF65-F5344CB8AC3E}">
-        <p14:creationId xmlns:p14="http://schemas.microsoft.com/office/powerpoint/2010/main" val="2587895887"/>
+        <p14:creationId xmlns:p14="http://schemas.microsoft.com/office/powerpoint/2010/main" val="2933606843"/>
       </p:ext>
     </p:extLst>
   </p:cSld>
@@ -11256,411 +11255,6 @@
 </file>
 
 <file path=ppt/slides/slide16.xml><?xml version="1.0" encoding="utf-8"?>
-<p:sld xmlns:a="http://schemas.openxmlformats.org/drawingml/2006/main" xmlns:r="http://schemas.openxmlformats.org/officeDocument/2006/relationships" xmlns:p="http://schemas.openxmlformats.org/presentationml/2006/main">
-  <p:cSld>
-    <p:spTree>
-      <p:nvGrpSpPr>
-        <p:cNvPr id="1" name=""/>
-        <p:cNvGrpSpPr/>
-        <p:nvPr/>
-      </p:nvGrpSpPr>
-      <p:grpSpPr>
-        <a:xfrm>
-          <a:off x="0" y="0"/>
-          <a:ext cx="0" cy="0"/>
-          <a:chOff x="0" y="0"/>
-          <a:chExt cx="0" cy="0"/>
-        </a:xfrm>
-      </p:grpSpPr>
-      <p:sp>
-        <p:nvSpPr>
-          <p:cNvPr id="15" name="Прямоугольник 14">
-            <a:extLst>
-              <a:ext uri="{FF2B5EF4-FFF2-40B4-BE49-F238E27FC236}">
-                <a16:creationId xmlns:a16="http://schemas.microsoft.com/office/drawing/2014/main" id="{7842705D-C9AC-40A1-AC34-D68CF5C67E18}"/>
-              </a:ext>
-            </a:extLst>
-          </p:cNvPr>
-          <p:cNvSpPr/>
-          <p:nvPr/>
-        </p:nvSpPr>
-        <p:spPr>
-          <a:xfrm>
-            <a:off x="221672" y="1336715"/>
-            <a:ext cx="11404947" cy="802105"/>
-          </a:xfrm>
-          <a:prstGeom prst="rect">
-            <a:avLst/>
-          </a:prstGeom>
-          <a:solidFill>
-            <a:srgbClr val="E1E1DB"/>
-          </a:solidFill>
-          <a:ln>
-            <a:noFill/>
-          </a:ln>
-        </p:spPr>
-        <p:style>
-          <a:lnRef idx="2">
-            <a:schemeClr val="accent1">
-              <a:shade val="50000"/>
-            </a:schemeClr>
-          </a:lnRef>
-          <a:fillRef idx="1">
-            <a:schemeClr val="accent1"/>
-          </a:fillRef>
-          <a:effectRef idx="0">
-            <a:schemeClr val="accent1"/>
-          </a:effectRef>
-          <a:fontRef idx="minor">
-            <a:schemeClr val="lt1"/>
-          </a:fontRef>
-        </p:style>
-        <p:txBody>
-          <a:bodyPr rtlCol="0" anchor="ctr"/>
-          <a:lstStyle/>
-          <a:p>
-            <a:pPr algn="ctr"/>
-            <a:endParaRPr lang="ru-RU"/>
-          </a:p>
-        </p:txBody>
-      </p:sp>
-      <p:sp>
-        <p:nvSpPr>
-          <p:cNvPr id="4" name="Заголовок 3">
-            <a:extLst>
-              <a:ext uri="{FF2B5EF4-FFF2-40B4-BE49-F238E27FC236}">
-                <a16:creationId xmlns:a16="http://schemas.microsoft.com/office/drawing/2014/main" id="{B1C65D02-A892-47DB-9440-9709654A3286}"/>
-              </a:ext>
-            </a:extLst>
-          </p:cNvPr>
-          <p:cNvSpPr>
-            <a:spLocks noGrp="1"/>
-          </p:cNvSpPr>
-          <p:nvPr>
-            <p:ph type="title"/>
-          </p:nvPr>
-        </p:nvSpPr>
-        <p:spPr>
-          <a:xfrm>
-            <a:off x="0" y="27788"/>
-            <a:ext cx="12192000" cy="802105"/>
-          </a:xfrm>
-        </p:spPr>
-        <p:txBody>
-          <a:bodyPr>
-            <a:normAutofit/>
-          </a:bodyPr>
-          <a:lstStyle/>
-          <a:p>
-            <a:pPr algn="ctr"/>
-            <a:r>
-              <a:rPr lang="ru-RU" dirty="0"/>
-              <a:t>Страницы приложения</a:t>
-            </a:r>
-          </a:p>
-        </p:txBody>
-      </p:sp>
-      <p:sp>
-        <p:nvSpPr>
-          <p:cNvPr id="11" name="Номер слайда 10">
-            <a:extLst>
-              <a:ext uri="{FF2B5EF4-FFF2-40B4-BE49-F238E27FC236}">
-                <a16:creationId xmlns:a16="http://schemas.microsoft.com/office/drawing/2014/main" id="{C5B6E0E2-0B86-4EF8-A6E9-C60914EE108C}"/>
-              </a:ext>
-            </a:extLst>
-          </p:cNvPr>
-          <p:cNvSpPr>
-            <a:spLocks noGrp="1"/>
-          </p:cNvSpPr>
-          <p:nvPr>
-            <p:ph type="sldNum" sz="quarter" idx="12"/>
-          </p:nvPr>
-        </p:nvSpPr>
-        <p:spPr/>
-        <p:txBody>
-          <a:bodyPr/>
-          <a:lstStyle/>
-          <a:p>
-            <a:fld id="{3C9EC098-2CBC-4E95-976E-3B85D117C1EE}" type="slidenum">
-              <a:rPr lang="ru-RU" smtClean="0"/>
-              <a:t>16</a:t>
-            </a:fld>
-            <a:endParaRPr lang="ru-RU"/>
-          </a:p>
-        </p:txBody>
-      </p:sp>
-      <p:sp>
-        <p:nvSpPr>
-          <p:cNvPr id="16" name="Прямоугольник 15">
-            <a:extLst>
-              <a:ext uri="{FF2B5EF4-FFF2-40B4-BE49-F238E27FC236}">
-                <a16:creationId xmlns:a16="http://schemas.microsoft.com/office/drawing/2014/main" id="{D81B67BC-90E2-47F9-8213-C72A96F91183}"/>
-              </a:ext>
-            </a:extLst>
-          </p:cNvPr>
-          <p:cNvSpPr/>
-          <p:nvPr/>
-        </p:nvSpPr>
-        <p:spPr>
-          <a:xfrm>
-            <a:off x="17144" y="5861305"/>
-            <a:ext cx="6078856" cy="382092"/>
-          </a:xfrm>
-          <a:prstGeom prst="rect">
-            <a:avLst/>
-          </a:prstGeom>
-        </p:spPr>
-        <p:txBody>
-          <a:bodyPr wrap="square">
-            <a:spAutoFit/>
-          </a:bodyPr>
-          <a:lstStyle/>
-          <a:p>
-            <a:pPr marL="180340" marR="180340" algn="ctr">
-              <a:lnSpc>
-                <a:spcPct val="150000"/>
-              </a:lnSpc>
-              <a:spcAft>
-                <a:spcPts val="0"/>
-              </a:spcAft>
-            </a:pPr>
-            <a:r>
-              <a:rPr lang="ru-RU" sz="1400" cap="all" spc="200" dirty="0">
-                <a:solidFill>
-                  <a:schemeClr val="tx2"/>
-                </a:solidFill>
-                <a:latin typeface="+mj-lt"/>
-              </a:rPr>
-              <a:t>Документация</a:t>
-            </a:r>
-          </a:p>
-        </p:txBody>
-      </p:sp>
-      <p:sp>
-        <p:nvSpPr>
-          <p:cNvPr id="9" name="Прямоугольник 8">
-            <a:extLst>
-              <a:ext uri="{FF2B5EF4-FFF2-40B4-BE49-F238E27FC236}">
-                <a16:creationId xmlns:a16="http://schemas.microsoft.com/office/drawing/2014/main" id="{9C3D87F7-F82B-4929-9554-21C0E1B61A61}"/>
-              </a:ext>
-            </a:extLst>
-          </p:cNvPr>
-          <p:cNvSpPr/>
-          <p:nvPr/>
-        </p:nvSpPr>
-        <p:spPr>
-          <a:xfrm>
-            <a:off x="8242808" y="5861305"/>
-            <a:ext cx="2492248" cy="382092"/>
-          </a:xfrm>
-          <a:prstGeom prst="rect">
-            <a:avLst/>
-          </a:prstGeom>
-        </p:spPr>
-        <p:txBody>
-          <a:bodyPr wrap="square">
-            <a:spAutoFit/>
-          </a:bodyPr>
-          <a:lstStyle/>
-          <a:p>
-            <a:pPr marL="180340" marR="180340" algn="ctr">
-              <a:lnSpc>
-                <a:spcPct val="150000"/>
-              </a:lnSpc>
-              <a:spcAft>
-                <a:spcPts val="0"/>
-              </a:spcAft>
-            </a:pPr>
-            <a:r>
-              <a:rPr lang="ru-RU" sz="1400" cap="all" spc="200" dirty="0">
-                <a:solidFill>
-                  <a:schemeClr val="tx2"/>
-                </a:solidFill>
-                <a:latin typeface="+mj-lt"/>
-              </a:rPr>
-              <a:t>Регистрация</a:t>
-            </a:r>
-          </a:p>
-        </p:txBody>
-      </p:sp>
-      <p:pic>
-        <p:nvPicPr>
-          <p:cNvPr id="10" name="Рисунок 9">
-            <a:extLst>
-              <a:ext uri="{FF2B5EF4-FFF2-40B4-BE49-F238E27FC236}">
-                <a16:creationId xmlns:a16="http://schemas.microsoft.com/office/drawing/2014/main" id="{A6EC4353-6C94-4EAE-8486-CF2985409886}"/>
-              </a:ext>
-            </a:extLst>
-          </p:cNvPr>
-          <p:cNvPicPr/>
-          <p:nvPr/>
-        </p:nvPicPr>
-        <p:blipFill>
-          <a:blip r:embed="rId2" cstate="print">
-            <a:extLst>
-              <a:ext uri="{28A0092B-C50C-407E-A947-70E740481C1C}">
-                <a14:useLocalDpi xmlns:a14="http://schemas.microsoft.com/office/drawing/2010/main" val="0"/>
-              </a:ext>
-            </a:extLst>
-          </a:blip>
-          <a:srcRect/>
-          <a:stretch>
-            <a:fillRect/>
-          </a:stretch>
-        </p:blipFill>
-        <p:spPr bwMode="auto">
-          <a:xfrm>
-            <a:off x="1787144" y="700399"/>
-            <a:ext cx="2492248" cy="5160906"/>
-          </a:xfrm>
-          <a:prstGeom prst="rect">
-            <a:avLst/>
-          </a:prstGeom>
-          <a:noFill/>
-          <a:ln>
-            <a:noFill/>
-          </a:ln>
-        </p:spPr>
-      </p:pic>
-      <p:pic>
-        <p:nvPicPr>
-          <p:cNvPr id="12" name="Рисунок 11">
-            <a:extLst>
-              <a:ext uri="{FF2B5EF4-FFF2-40B4-BE49-F238E27FC236}">
-                <a16:creationId xmlns:a16="http://schemas.microsoft.com/office/drawing/2014/main" id="{020A319A-15E4-4174-9F53-370C2C44EFD5}"/>
-              </a:ext>
-            </a:extLst>
-          </p:cNvPr>
-          <p:cNvPicPr/>
-          <p:nvPr/>
-        </p:nvPicPr>
-        <p:blipFill>
-          <a:blip r:embed="rId3" cstate="print">
-            <a:extLst>
-              <a:ext uri="{28A0092B-C50C-407E-A947-70E740481C1C}">
-                <a14:useLocalDpi xmlns:a14="http://schemas.microsoft.com/office/drawing/2010/main" val="0"/>
-              </a:ext>
-            </a:extLst>
-          </a:blip>
-          <a:srcRect/>
-          <a:stretch>
-            <a:fillRect/>
-          </a:stretch>
-        </p:blipFill>
-        <p:spPr bwMode="auto">
-          <a:xfrm>
-            <a:off x="5014976" y="700399"/>
-            <a:ext cx="2492248" cy="5160905"/>
-          </a:xfrm>
-          <a:prstGeom prst="rect">
-            <a:avLst/>
-          </a:prstGeom>
-          <a:noFill/>
-          <a:ln>
-            <a:noFill/>
-          </a:ln>
-        </p:spPr>
-      </p:pic>
-      <p:pic>
-        <p:nvPicPr>
-          <p:cNvPr id="13" name="Рисунок 12">
-            <a:extLst>
-              <a:ext uri="{FF2B5EF4-FFF2-40B4-BE49-F238E27FC236}">
-                <a16:creationId xmlns:a16="http://schemas.microsoft.com/office/drawing/2014/main" id="{CE985B71-D9DC-469C-BD8F-169432DC2B92}"/>
-              </a:ext>
-            </a:extLst>
-          </p:cNvPr>
-          <p:cNvPicPr/>
-          <p:nvPr/>
-        </p:nvPicPr>
-        <p:blipFill>
-          <a:blip r:embed="rId4" cstate="print">
-            <a:extLst>
-              <a:ext uri="{28A0092B-C50C-407E-A947-70E740481C1C}">
-                <a14:useLocalDpi xmlns:a14="http://schemas.microsoft.com/office/drawing/2010/main" val="0"/>
-              </a:ext>
-            </a:extLst>
-          </a:blip>
-          <a:srcRect/>
-          <a:stretch>
-            <a:fillRect/>
-          </a:stretch>
-        </p:blipFill>
-        <p:spPr bwMode="auto">
-          <a:xfrm>
-            <a:off x="8443976" y="700399"/>
-            <a:ext cx="2492248" cy="5160904"/>
-          </a:xfrm>
-          <a:prstGeom prst="rect">
-            <a:avLst/>
-          </a:prstGeom>
-          <a:noFill/>
-          <a:ln>
-            <a:noFill/>
-          </a:ln>
-        </p:spPr>
-      </p:pic>
-      <p:sp>
-        <p:nvSpPr>
-          <p:cNvPr id="14" name="Прямоугольник 13">
-            <a:extLst>
-              <a:ext uri="{FF2B5EF4-FFF2-40B4-BE49-F238E27FC236}">
-                <a16:creationId xmlns:a16="http://schemas.microsoft.com/office/drawing/2014/main" id="{C1E54F80-325C-468B-870E-9E909062D31D}"/>
-              </a:ext>
-            </a:extLst>
-          </p:cNvPr>
-          <p:cNvSpPr/>
-          <p:nvPr/>
-        </p:nvSpPr>
-        <p:spPr>
-          <a:xfrm>
-            <a:off x="5014976" y="5861303"/>
-            <a:ext cx="2492248" cy="382092"/>
-          </a:xfrm>
-          <a:prstGeom prst="rect">
-            <a:avLst/>
-          </a:prstGeom>
-        </p:spPr>
-        <p:txBody>
-          <a:bodyPr wrap="square">
-            <a:spAutoFit/>
-          </a:bodyPr>
-          <a:lstStyle/>
-          <a:p>
-            <a:pPr marL="180340" marR="180340" algn="ctr">
-              <a:lnSpc>
-                <a:spcPct val="150000"/>
-              </a:lnSpc>
-              <a:spcAft>
-                <a:spcPts val="0"/>
-              </a:spcAft>
-            </a:pPr>
-            <a:r>
-              <a:rPr lang="ru-RU" sz="1400" cap="all" spc="200" dirty="0">
-                <a:solidFill>
-                  <a:schemeClr val="tx2"/>
-                </a:solidFill>
-                <a:latin typeface="+mj-lt"/>
-              </a:rPr>
-              <a:t>Авторизация</a:t>
-            </a:r>
-          </a:p>
-        </p:txBody>
-      </p:sp>
-    </p:spTree>
-    <p:extLst>
-      <p:ext uri="{BB962C8B-B14F-4D97-AF65-F5344CB8AC3E}">
-        <p14:creationId xmlns:p14="http://schemas.microsoft.com/office/powerpoint/2010/main" val="2933606843"/>
-      </p:ext>
-    </p:extLst>
-  </p:cSld>
-  <p:clrMapOvr>
-    <a:masterClrMapping/>
-  </p:clrMapOvr>
-</p:sld>
-</file>
-
-<file path=ppt/slides/slide17.xml><?xml version="1.0" encoding="utf-8"?>
 <p:sld xmlns:a="http://schemas.openxmlformats.org/drawingml/2006/main" xmlns:r="http://schemas.openxmlformats.org/officeDocument/2006/relationships" xmlns:p="http://schemas.openxmlformats.org/presentationml/2006/main">
   <p:cSld>
     <p:spTree>
@@ -11788,7 +11382,7 @@
           <a:p>
             <a:fld id="{3C9EC098-2CBC-4E95-976E-3B85D117C1EE}" type="slidenum">
               <a:rPr lang="ru-RU" smtClean="0"/>
-              <a:t>17</a:t>
+              <a:t>16</a:t>
             </a:fld>
             <a:endParaRPr lang="ru-RU"/>
           </a:p>
@@ -12053,7 +11647,7 @@
 </p:sld>
 </file>
 
-<file path=ppt/slides/slide18.xml><?xml version="1.0" encoding="utf-8"?>
+<file path=ppt/slides/slide17.xml><?xml version="1.0" encoding="utf-8"?>
 <p:sld xmlns:a="http://schemas.openxmlformats.org/drawingml/2006/main" xmlns:r="http://schemas.openxmlformats.org/officeDocument/2006/relationships" xmlns:p="http://schemas.openxmlformats.org/presentationml/2006/main">
   <p:cSld>
     <p:spTree>
@@ -12181,7 +11775,7 @@
           <a:p>
             <a:fld id="{3C9EC098-2CBC-4E95-976E-3B85D117C1EE}" type="slidenum">
               <a:rPr lang="ru-RU" smtClean="0"/>
-              <a:t>18</a:t>
+              <a:t>17</a:t>
             </a:fld>
             <a:endParaRPr lang="ru-RU"/>
           </a:p>
@@ -12450,7 +12044,7 @@
 </p:sld>
 </file>
 
-<file path=ppt/slides/slide19.xml><?xml version="1.0" encoding="utf-8"?>
+<file path=ppt/slides/slide18.xml><?xml version="1.0" encoding="utf-8"?>
 <p:sld xmlns:a="http://schemas.openxmlformats.org/drawingml/2006/main" xmlns:r="http://schemas.openxmlformats.org/officeDocument/2006/relationships" xmlns:p="http://schemas.openxmlformats.org/presentationml/2006/main">
   <p:cSld>
     <p:spTree>
@@ -12578,7 +12172,7 @@
           <a:p>
             <a:fld id="{3C9EC098-2CBC-4E95-976E-3B85D117C1EE}" type="slidenum">
               <a:rPr lang="ru-RU" smtClean="0"/>
-              <a:t>19</a:t>
+              <a:t>18</a:t>
             </a:fld>
             <a:endParaRPr lang="ru-RU"/>
           </a:p>
@@ -12855,124 +12449,7 @@
 </p:sld>
 </file>
 
-<file path=ppt/slides/slide2.xml><?xml version="1.0" encoding="utf-8"?>
-<p:sld xmlns:a="http://schemas.openxmlformats.org/drawingml/2006/main" xmlns:r="http://schemas.openxmlformats.org/officeDocument/2006/relationships" xmlns:p="http://schemas.openxmlformats.org/presentationml/2006/main">
-  <p:cSld>
-    <p:spTree>
-      <p:nvGrpSpPr>
-        <p:cNvPr id="1" name=""/>
-        <p:cNvGrpSpPr/>
-        <p:nvPr/>
-      </p:nvGrpSpPr>
-      <p:grpSpPr>
-        <a:xfrm>
-          <a:off x="0" y="0"/>
-          <a:ext cx="0" cy="0"/>
-          <a:chOff x="0" y="0"/>
-          <a:chExt cx="0" cy="0"/>
-        </a:xfrm>
-      </p:grpSpPr>
-      <p:sp>
-        <p:nvSpPr>
-          <p:cNvPr id="2" name="Заголовок 1">
-            <a:extLst>
-              <a:ext uri="{FF2B5EF4-FFF2-40B4-BE49-F238E27FC236}">
-                <a16:creationId xmlns:a16="http://schemas.microsoft.com/office/drawing/2014/main" id="{4405D1BC-A25A-4E1A-91DD-A1C15BABAFF9}"/>
-              </a:ext>
-            </a:extLst>
-          </p:cNvPr>
-          <p:cNvSpPr>
-            <a:spLocks noGrp="1"/>
-          </p:cNvSpPr>
-          <p:nvPr>
-            <p:ph type="title"/>
-          </p:nvPr>
-        </p:nvSpPr>
-        <p:spPr/>
-        <p:txBody>
-          <a:bodyPr/>
-          <a:lstStyle/>
-          <a:p>
-            <a:r>
-              <a:rPr lang="ru-RU" dirty="0"/>
-              <a:t>Введение</a:t>
-            </a:r>
-          </a:p>
-        </p:txBody>
-      </p:sp>
-      <p:sp>
-        <p:nvSpPr>
-          <p:cNvPr id="3" name="Объект 2">
-            <a:extLst>
-              <a:ext uri="{FF2B5EF4-FFF2-40B4-BE49-F238E27FC236}">
-                <a16:creationId xmlns:a16="http://schemas.microsoft.com/office/drawing/2014/main" id="{AC677BB0-C9F0-4DB7-ACB0-8C5D407A70F6}"/>
-              </a:ext>
-            </a:extLst>
-          </p:cNvPr>
-          <p:cNvSpPr>
-            <a:spLocks noGrp="1"/>
-          </p:cNvSpPr>
-          <p:nvPr>
-            <p:ph idx="1"/>
-          </p:nvPr>
-        </p:nvSpPr>
-        <p:spPr/>
-        <p:txBody>
-          <a:bodyPr>
-            <a:normAutofit/>
-          </a:bodyPr>
-          <a:lstStyle/>
-          <a:p>
-            <a:r>
-              <a:rPr lang="ru-RU" sz="2400" dirty="0"/>
-              <a:t>С развитием цифровых технологий и их активным внедрением в различные сферы жизни, искусство претерпевает значительные изменения. Одной из ключевых тенденций является переход к виртуальным форматам взаимодействия с произведениями искусства, что особенно актуально в условиях глобализации и развития удаленных коммуникаций. Создание виртуальных арт-галерей становится важным инструментом для популяризации искусства, расширения аудитории и предоставления пользователям доступа к культурному наследию, независимо от их географического положения.</a:t>
-            </a:r>
-          </a:p>
-        </p:txBody>
-      </p:sp>
-      <p:sp>
-        <p:nvSpPr>
-          <p:cNvPr id="5" name="Номер слайда 4">
-            <a:extLst>
-              <a:ext uri="{FF2B5EF4-FFF2-40B4-BE49-F238E27FC236}">
-                <a16:creationId xmlns:a16="http://schemas.microsoft.com/office/drawing/2014/main" id="{DC931FC9-C717-4263-9760-DF92D2633D76}"/>
-              </a:ext>
-            </a:extLst>
-          </p:cNvPr>
-          <p:cNvSpPr>
-            <a:spLocks noGrp="1"/>
-          </p:cNvSpPr>
-          <p:nvPr>
-            <p:ph type="sldNum" sz="quarter" idx="12"/>
-          </p:nvPr>
-        </p:nvSpPr>
-        <p:spPr/>
-        <p:txBody>
-          <a:bodyPr/>
-          <a:lstStyle/>
-          <a:p>
-            <a:fld id="{3C9EC098-2CBC-4E95-976E-3B85D117C1EE}" type="slidenum">
-              <a:rPr lang="ru-RU" smtClean="0"/>
-              <a:t>2</a:t>
-            </a:fld>
-            <a:endParaRPr lang="ru-RU"/>
-          </a:p>
-        </p:txBody>
-      </p:sp>
-    </p:spTree>
-    <p:extLst>
-      <p:ext uri="{BB962C8B-B14F-4D97-AF65-F5344CB8AC3E}">
-        <p14:creationId xmlns:p14="http://schemas.microsoft.com/office/powerpoint/2010/main" val="380808488"/>
-      </p:ext>
-    </p:extLst>
-  </p:cSld>
-  <p:clrMapOvr>
-    <a:masterClrMapping/>
-  </p:clrMapOvr>
-</p:sld>
-</file>
-
-<file path=ppt/slides/slide20.xml><?xml version="1.0" encoding="utf-8"?>
+<file path=ppt/slides/slide19.xml><?xml version="1.0" encoding="utf-8"?>
 <p:sld xmlns:a="http://schemas.openxmlformats.org/drawingml/2006/main" xmlns:r="http://schemas.openxmlformats.org/officeDocument/2006/relationships" xmlns:p="http://schemas.openxmlformats.org/presentationml/2006/main">
   <p:cSld>
     <p:spTree>
@@ -13100,7 +12577,7 @@
           <a:p>
             <a:fld id="{3C9EC098-2CBC-4E95-976E-3B85D117C1EE}" type="slidenum">
               <a:rPr lang="ru-RU" smtClean="0"/>
-              <a:t>20</a:t>
+              <a:t>19</a:t>
             </a:fld>
             <a:endParaRPr lang="ru-RU"/>
           </a:p>
@@ -13560,7 +13037,7 @@
 </p:sld>
 </file>
 
-<file path=ppt/slides/slide21.xml><?xml version="1.0" encoding="utf-8"?>
+<file path=ppt/slides/slide2.xml><?xml version="1.0" encoding="utf-8"?>
 <p:sld xmlns:a="http://schemas.openxmlformats.org/drawingml/2006/main" xmlns:r="http://schemas.openxmlformats.org/officeDocument/2006/relationships" xmlns:p="http://schemas.openxmlformats.org/presentationml/2006/main">
   <p:cSld>
     <p:spTree>
@@ -13582,6 +13059,123 @@
           <p:cNvPr id="2" name="Заголовок 1">
             <a:extLst>
               <a:ext uri="{FF2B5EF4-FFF2-40B4-BE49-F238E27FC236}">
+                <a16:creationId xmlns:a16="http://schemas.microsoft.com/office/drawing/2014/main" id="{4405D1BC-A25A-4E1A-91DD-A1C15BABAFF9}"/>
+              </a:ext>
+            </a:extLst>
+          </p:cNvPr>
+          <p:cNvSpPr>
+            <a:spLocks noGrp="1"/>
+          </p:cNvSpPr>
+          <p:nvPr>
+            <p:ph type="title"/>
+          </p:nvPr>
+        </p:nvSpPr>
+        <p:spPr/>
+        <p:txBody>
+          <a:bodyPr/>
+          <a:lstStyle/>
+          <a:p>
+            <a:r>
+              <a:rPr lang="ru-RU" dirty="0"/>
+              <a:t>Введение</a:t>
+            </a:r>
+          </a:p>
+        </p:txBody>
+      </p:sp>
+      <p:sp>
+        <p:nvSpPr>
+          <p:cNvPr id="3" name="Объект 2">
+            <a:extLst>
+              <a:ext uri="{FF2B5EF4-FFF2-40B4-BE49-F238E27FC236}">
+                <a16:creationId xmlns:a16="http://schemas.microsoft.com/office/drawing/2014/main" id="{AC677BB0-C9F0-4DB7-ACB0-8C5D407A70F6}"/>
+              </a:ext>
+            </a:extLst>
+          </p:cNvPr>
+          <p:cNvSpPr>
+            <a:spLocks noGrp="1"/>
+          </p:cNvSpPr>
+          <p:nvPr>
+            <p:ph idx="1"/>
+          </p:nvPr>
+        </p:nvSpPr>
+        <p:spPr/>
+        <p:txBody>
+          <a:bodyPr>
+            <a:normAutofit/>
+          </a:bodyPr>
+          <a:lstStyle/>
+          <a:p>
+            <a:r>
+              <a:rPr lang="ru-RU" sz="2400" dirty="0"/>
+              <a:t>С развитием цифровых технологий и их активным внедрением в различные сферы жизни, искусство претерпевает значительные изменения. Одной из ключевых тенденций является переход к виртуальным форматам взаимодействия с произведениями искусства, что особенно актуально в условиях глобализации и развития удаленных коммуникаций. Создание виртуальных арт-галерей становится важным инструментом для популяризации искусства, расширения аудитории и предоставления пользователям доступа к культурному наследию, независимо от их географического положения.</a:t>
+            </a:r>
+          </a:p>
+        </p:txBody>
+      </p:sp>
+      <p:sp>
+        <p:nvSpPr>
+          <p:cNvPr id="5" name="Номер слайда 4">
+            <a:extLst>
+              <a:ext uri="{FF2B5EF4-FFF2-40B4-BE49-F238E27FC236}">
+                <a16:creationId xmlns:a16="http://schemas.microsoft.com/office/drawing/2014/main" id="{DC931FC9-C717-4263-9760-DF92D2633D76}"/>
+              </a:ext>
+            </a:extLst>
+          </p:cNvPr>
+          <p:cNvSpPr>
+            <a:spLocks noGrp="1"/>
+          </p:cNvSpPr>
+          <p:nvPr>
+            <p:ph type="sldNum" sz="quarter" idx="12"/>
+          </p:nvPr>
+        </p:nvSpPr>
+        <p:spPr/>
+        <p:txBody>
+          <a:bodyPr/>
+          <a:lstStyle/>
+          <a:p>
+            <a:fld id="{3C9EC098-2CBC-4E95-976E-3B85D117C1EE}" type="slidenum">
+              <a:rPr lang="ru-RU" smtClean="0"/>
+              <a:t>2</a:t>
+            </a:fld>
+            <a:endParaRPr lang="ru-RU"/>
+          </a:p>
+        </p:txBody>
+      </p:sp>
+    </p:spTree>
+    <p:extLst>
+      <p:ext uri="{BB962C8B-B14F-4D97-AF65-F5344CB8AC3E}">
+        <p14:creationId xmlns:p14="http://schemas.microsoft.com/office/powerpoint/2010/main" val="380808488"/>
+      </p:ext>
+    </p:extLst>
+  </p:cSld>
+  <p:clrMapOvr>
+    <a:masterClrMapping/>
+  </p:clrMapOvr>
+</p:sld>
+</file>
+
+<file path=ppt/slides/slide20.xml><?xml version="1.0" encoding="utf-8"?>
+<p:sld xmlns:a="http://schemas.openxmlformats.org/drawingml/2006/main" xmlns:r="http://schemas.openxmlformats.org/officeDocument/2006/relationships" xmlns:p="http://schemas.openxmlformats.org/presentationml/2006/main">
+  <p:cSld>
+    <p:spTree>
+      <p:nvGrpSpPr>
+        <p:cNvPr id="1" name=""/>
+        <p:cNvGrpSpPr/>
+        <p:nvPr/>
+      </p:nvGrpSpPr>
+      <p:grpSpPr>
+        <a:xfrm>
+          <a:off x="0" y="0"/>
+          <a:ext cx="0" cy="0"/>
+          <a:chOff x="0" y="0"/>
+          <a:chExt cx="0" cy="0"/>
+        </a:xfrm>
+      </p:grpSpPr>
+      <p:sp>
+        <p:nvSpPr>
+          <p:cNvPr id="2" name="Заголовок 1">
+            <a:extLst>
+              <a:ext uri="{FF2B5EF4-FFF2-40B4-BE49-F238E27FC236}">
                 <a16:creationId xmlns:a16="http://schemas.microsoft.com/office/drawing/2014/main" id="{3C04F458-1CF0-49FE-905E-6B0FF31FBD23}"/>
               </a:ext>
             </a:extLst>
@@ -13673,7 +13267,7 @@
           <a:p>
             <a:fld id="{3C9EC098-2CBC-4E95-976E-3B85D117C1EE}" type="slidenum">
               <a:rPr lang="ru-RU" smtClean="0"/>
-              <a:t>21</a:t>
+              <a:t>20</a:t>
             </a:fld>
             <a:endParaRPr lang="ru-RU"/>
           </a:p>
@@ -13692,7 +13286,7 @@
 </p:sld>
 </file>
 
-<file path=ppt/slides/slide22.xml><?xml version="1.0" encoding="utf-8"?>
+<file path=ppt/slides/slide21.xml><?xml version="1.0" encoding="utf-8"?>
 <p:sld xmlns:a="http://schemas.openxmlformats.org/drawingml/2006/main" xmlns:r="http://schemas.openxmlformats.org/officeDocument/2006/relationships" xmlns:p="http://schemas.openxmlformats.org/presentationml/2006/main">
   <p:cSld>
     <p:spTree>

--- a/Документы/ИСТ122_ТРМП_КП_Презентация_Жминьковская.pptx
+++ b/Документы/ИСТ122_ТРМП_КП_Презентация_Жминьковская.pptx
@@ -13899,26 +13899,8 @@
           <a:lstStyle/>
           <a:p>
             <a:r>
-              <a:rPr lang="ru-RU" b="1" dirty="0"/>
-              <a:t>Распределение обязанностей.</a:t>
-            </a:r>
-          </a:p>
-          <a:p>
-            <a:r>
-              <a:rPr lang="ru-RU" dirty="0"/>
+              <a:rPr lang="ru-RU" sz="3200" dirty="0"/>
               <a:t>Модуль «Администрирование». Процессы: управление категориями, модерация публикаций, оценивание и комментирование публикаций.</a:t>
-            </a:r>
-          </a:p>
-          <a:p>
-            <a:r>
-              <a:rPr lang="ru-RU" dirty="0"/>
-              <a:t>Модуль «Эксплуатация». Процессы: управление выставками, участие в выставках, профили художников, страницы просмотра.</a:t>
-            </a:r>
-          </a:p>
-          <a:p>
-            <a:r>
-              <a:rPr lang="ru-RU" dirty="0"/>
-              <a:t>Общий модуль. Процессы: аутентификация, управление и просмотр публикаций. </a:t>
             </a:r>
           </a:p>
         </p:txBody>
